--- a/VEXPLOR_AAS_Studio_user_manual.pptx
+++ b/VEXPLOR_AAS_Studio_user_manual.pptx
@@ -145,23 +145,23 @@
   <p:extLst>
     <p:ext uri="{521415D9-36F7-43E2-AB2F-B90AF26B5E84}">
       <p14:sectionLst xmlns:p14="http://schemas.microsoft.com/office/powerpoint/2010/main">
-        <p14:section name="표지" id="{0959413a-71ec-2823-8976-40f070713cb4}">
+        <p14:section name="표지" id="{df7b5bfb-b47a-e64a-c8e1-035443a17b54}">
           <p14:sldIdLst>
             <p14:sldId id="256"/>
           </p14:sldIdLst>
         </p14:section>
-        <p14:section name="차례" id="{edc17e75-7992-300b-db1d-0ddcce24f7c6}">
+        <p14:section name="차례" id="{2bb05234-9e61-9c46-6578-6892a1b963ab}">
           <p14:sldIdLst>
             <p14:sldId id="257"/>
           </p14:sldIdLst>
         </p14:section>
-        <p14:section name="소개" id="{ff2d75b8-7a0d-d19d-e6b2-6182bdaffc0b}">
+        <p14:section name="소개" id="{fc5ed34e-214d-79bf-6f71-e83cb223234e}">
           <p14:sldIdLst>
             <p14:sldId id="258"/>
             <p14:sldId id="259"/>
           </p14:sldIdLst>
         </p14:section>
-        <p14:section name="시작하기" id="{09a3df8e-b32a-36fc-50c0-bf672224f10f}">
+        <p14:section name="시작하기" id="{ff97b2a6-6019-9d36-c02e-0312f9b1ac05}">
           <p14:sldIdLst>
             <p14:sldId id="260"/>
             <p14:sldId id="261"/>
@@ -169,7 +169,7 @@
             <p14:sldId id="263"/>
           </p14:sldIdLst>
         </p14:section>
-        <p14:section name="화면 둘러보기" id="{68d2b222-3fb1-2a81-e271-f45b9bcd23de}">
+        <p14:section name="화면 둘러보기" id="{46d95589-4c12-a538-8db3-22a1a7ab8491}">
           <p14:sldIdLst>
             <p14:sldId id="264"/>
             <p14:sldId id="265"/>
@@ -177,7 +177,7 @@
             <p14:sldId id="267"/>
           </p14:sldIdLst>
         </p14:section>
-        <p14:section name="파일 열기" id="{cc0d5b5e-c9c2-2e1e-1f27-6e06ffd666c6}">
+        <p14:section name="파일 열기" id="{8ae0b903-56bc-1457-9583-22720024703f}">
           <p14:sldIdLst>
             <p14:sldId id="268"/>
             <p14:sldId id="269"/>
@@ -185,7 +185,7 @@
             <p14:sldId id="271"/>
           </p14:sldIdLst>
         </p14:section>
-        <p14:section name="만들고 고치기" id="{7ebdb67c-e8e5-90a1-cc5d-c0f3003652ea}">
+        <p14:section name="만들고 고치기" id="{0e294755-42b6-3d2e-baf8-fa349b0c0072}">
           <p14:sldIdLst>
             <p14:sldId id="272"/>
             <p14:sldId id="273"/>
@@ -195,35 +195,35 @@
             <p14:sldId id="277"/>
           </p14:sldIdLst>
         </p14:section>
-        <p14:section name="검사와 자동 고치기" id="{2c724184-c34c-c949-ae20-26df4bfb4fe2}">
+        <p14:section name="검사와 자동 고치기" id="{2a2cc529-7601-83a0-0ef0-9474b3c27c93}">
           <p14:sldIdLst>
             <p14:sldId id="278"/>
             <p14:sldId id="279"/>
             <p14:sldId id="280"/>
           </p14:sldIdLst>
         </p14:section>
-        <p14:section name="내보내기" id="{ae076341-02b3-1f5d-b4ef-6cb9b86c6e12}">
+        <p14:section name="내보내기" id="{6908f703-c928-8940-f40c-648654f9ce0a}">
           <p14:sldIdLst>
             <p14:sldId id="281"/>
             <p14:sldId id="282"/>
             <p14:sldId id="283"/>
           </p14:sldIdLst>
         </p14:section>
-        <p14:section name="공정과 레퍼런스 번들" id="{486d3685-23eb-4c9a-da04-69d205920420}">
+        <p14:section name="공정과 레퍼런스 번들" id="{527558d5-31b1-aae5-b786-d8f933b2f13a}">
           <p14:sldIdLst>
             <p14:sldId id="284"/>
             <p14:sldId id="285"/>
             <p14:sldId id="286"/>
           </p14:sldIdLst>
         </p14:section>
-        <p14:section name="현장 값 수집과 제공" id="{99d32b6e-800b-116c-0fa3-296ea112b26d}">
+        <p14:section name="현장 값 수집과 제공" id="{65f5d439-5e58-37d4-f266-f2c15c80ed4a}">
           <p14:sldIdLst>
             <p14:sldId id="287"/>
             <p14:sldId id="288"/>
             <p14:sldId id="289"/>
           </p14:sldIdLst>
         </p14:section>
-        <p14:section name="내 계정과 설정" id="{61e8ffbb-92b6-5e1e-6383-5b1c72d8225d}">
+        <p14:section name="내 계정과 설정" id="{bc426c36-be01-3eea-72c0-da3d8cf366b4}">
           <p14:sldIdLst>
             <p14:sldId id="290"/>
             <p14:sldId id="291"/>
@@ -231,7 +231,7 @@
             <p14:sldId id="293"/>
           </p14:sldIdLst>
         </p14:section>
-        <p14:section name="마무리" id="{adbdad52-ec97-5f03-da30-8f7bd21d0ab7}">
+        <p14:section name="마무리" id="{ecfec13a-e237-8df8-38e9-fdabc534e0cc}">
           <p14:sldIdLst>
             <p14:sldId id="294"/>
           </p14:sldIdLst>
@@ -17199,7 +17199,7 @@
                 <a:ea typeface="Malgun Gothic" pitchFamily="34" charset="-122"/>
                 <a:cs typeface="Malgun Gothic" pitchFamily="34" charset="-120"/>
               </a:rPr>
-              <a:t>여러 설비를 공정으로 · 제출용 묶음</a:t>
+              <a:t>여러 설비를 공정으로 · ZIP 묶음</a:t>
             </a:r>
             <a:endParaRPr lang="en-US" sz="1600" dirty="0"/>
           </a:p>
@@ -20683,7 +20683,7 @@
                 <a:ea typeface="Malgun Gothic" pitchFamily="34" charset="-122"/>
                 <a:cs typeface="Malgun Gothic" pitchFamily="34" charset="-120"/>
               </a:rPr>
-              <a:t>위반은 제출 전에 반드시 고칩니다</a:t>
+              <a:t>위반은 반드시 고칩니다</a:t>
             </a:r>
             <a:endParaRPr lang="en-US" sz="1400" dirty="0"/>
           </a:p>
@@ -21543,7 +21543,7 @@
                           <a:ea typeface="Malgun Gothic" pitchFamily="34" charset="-122"/>
                           <a:cs typeface="Malgun Gothic" pitchFamily="34" charset="-120"/>
                         </a:rPr>
-                        <a:t>제출 전에 반드시 고칩니다</a:t>
+                        <a:t>반드시 고칩니다</a:t>
                       </a:r>
                       <a:endParaRPr lang="en-US" sz="1300" dirty="0">
                         <a:latin typeface="Malgun Gothic" charset="0"/>
@@ -21681,7 +21681,7 @@
                           <a:ea typeface="Malgun Gothic" pitchFamily="34" charset="-122"/>
                           <a:cs typeface="Malgun Gothic" pitchFamily="34" charset="-120"/>
                         </a:rPr>
-                        <a:t>제출은 되지만 표준 · 상호운용에 문제</a:t>
+                        <a:t>표준 · 상호운용에 문제가 될 수 있음</a:t>
                       </a:r>
                       <a:endParaRPr lang="en-US" sz="1300" dirty="0">
                         <a:latin typeface="Malgun Gothic" charset="0"/>
@@ -22131,7 +22131,7 @@
                 <a:ea typeface="Malgun Gothic" pitchFamily="34" charset="-122"/>
                 <a:cs typeface="Malgun Gothic" pitchFamily="34" charset="-120"/>
               </a:rPr>
-              <a:t>0건이어야 제출할 수 있습니다.</a:t>
+              <a:t>0건이 되도록 고칩니다.</a:t>
             </a:r>
             <a:endParaRPr lang="en-US" sz="1400" dirty="0"/>
           </a:p>
@@ -25518,7 +25518,7 @@
                 <a:ea typeface="Malgun Gothic" pitchFamily="34" charset="-122"/>
                 <a:cs typeface="Malgun Gothic" pitchFamily="34" charset="-120"/>
               </a:rPr>
-              <a:t>제출  </a:t>
+              <a:t>권장  </a:t>
             </a:r>
             <a:pPr indent="0" marL="0">
               <a:buNone/>
@@ -25532,7 +25532,7 @@
                 <a:ea typeface="Malgun Gothic" pitchFamily="34" charset="-122"/>
                 <a:cs typeface="Malgun Gothic" pitchFamily="34" charset="-120"/>
               </a:rPr>
-              <a:t>제출용 파일은 위반 0건 상태에서 내려받으세요. 최종 판정은 KOSMO Validator가 합니다.</a:t>
+              <a:t>완성본은 위반 0건 상태에서 내려받으세요. 공식 판정은 KOSMO Validator가 합니다.</a:t>
             </a:r>
             <a:endParaRPr lang="en-US" sz="1250" dirty="0"/>
           </a:p>
@@ -25721,7 +25721,7 @@
                 <a:ea typeface="Malgun Gothic" pitchFamily="34" charset="-122"/>
                 <a:cs typeface="Malgun Gothic" pitchFamily="34" charset="-120"/>
               </a:rPr>
-              <a:t>여러 설비를 공정으로 · 제출용 묶음(ZIP)</a:t>
+              <a:t>여러 설비를 공정으로 · ZIP 묶음</a:t>
             </a:r>
             <a:endParaRPr lang="en-US" sz="1700" dirty="0"/>
           </a:p>
@@ -30207,7 +30207,7 @@
                 <a:ea typeface="Malgun Gothic" pitchFamily="34" charset="-122"/>
                 <a:cs typeface="Malgun Gothic" pitchFamily="34" charset="-120"/>
               </a:rPr>
-              <a:t>연결하면 파일에 수집 연결(AID)이 추가되어 「시연본」이 됩니다. 제출할 파일에는 연결하지 마세요.</a:t>
+              <a:t>연결하면 파일에 수집 연결(AID)이 추가되어 「시연본」이 됩니다. 원본 파일에는 연결하지 마세요.</a:t>
             </a:r>
             <a:endParaRPr lang="en-US" sz="1250" dirty="0"/>
           </a:p>
@@ -33520,7 +33520,7 @@
                           <a:ea typeface="Malgun Gothic" pitchFamily="34" charset="-122"/>
                           <a:cs typeface="Malgun Gothic" pitchFamily="34" charset="-120"/>
                         </a:rPr>
-                        <a:t>체험판은 일정 시간이 지나면 초기화됩니다. 계속 쓰려면 회원가입하세요.</a:t>
+                        <a:t>체험판은 일정 시간 후 초기화 됩니다. 계속 쓰려면 회원가입하세요.</a:t>
                       </a:r>
                       <a:endParaRPr lang="en-US" sz="1400" dirty="0">
                         <a:latin typeface="Malgun Gothic" charset="0"/>
@@ -33728,7 +33728,7 @@
                           <a:ea typeface="Malgun Gothic" pitchFamily="34" charset="-122"/>
                           <a:cs typeface="Malgun Gothic" pitchFamily="34" charset="-120"/>
                         </a:rPr>
-                        <a:t>위반 0건인데 제출처에서 떨어질 수 있나요?</a:t>
+                        <a:t>위반 0건이면 KOSMO Validator도 통과하나요?</a:t>
                       </a:r>
                       <a:endParaRPr lang="en-US" sz="1400" dirty="0">
                         <a:latin typeface="Malgun Gothic" charset="0"/>
@@ -33796,7 +33796,7 @@
                           <a:ea typeface="Malgun Gothic" pitchFamily="34" charset="-122"/>
                           <a:cs typeface="Malgun Gothic" pitchFamily="34" charset="-120"/>
                         </a:rPr>
-                        <a:t>있습니다. 최종 판정은 KOSMO Validator가 합니다 — 이 도구는 사전 점검입니다.</a:t>
+                        <a:t>대부분 그렇지만 보장하지는 않습니다. 공식 판정은 KOSMO Validator가 합니다 — 이 도구는 사전 점검입니다.</a:t>
                       </a:r>
                       <a:endParaRPr lang="en-US" sz="1400" dirty="0">
                         <a:latin typeface="Malgun Gothic" charset="0"/>
@@ -35393,7 +35393,7 @@
                 <a:ea typeface="Malgun Gothic" pitchFamily="34" charset="-122"/>
                 <a:cs typeface="Malgun Gothic" pitchFamily="34" charset="-120"/>
               </a:rPr>
-              <a:t>최종 합격 판정은 제출처 검증기(KOSMO Validator)가 합니다. 이 도구의 검사는 제출 전에 미리 걸러 주는 사전 점검입니다.</a:t>
+              <a:t>이 도구는 KOSMO 규칙을 따라 검사합니다. 공식 판정은 KOSMO Validator가 하며, 이 도구의 검사는 미리 걸러 주는 사전 점검입니다.</a:t>
             </a:r>
             <a:endParaRPr lang="en-US" sz="1250" dirty="0"/>
           </a:p>
@@ -38506,7 +38506,7 @@
                 <a:ea typeface="Malgun Gothic" pitchFamily="34" charset="-122"/>
                 <a:cs typeface="Malgun Gothic" pitchFamily="34" charset="-120"/>
               </a:rPr>
-              <a:t>체험판은 일정 시간이 지나면 초기화됩니다.</a:t>
+              <a:t>체험판은 일정 시간 후 초기화 됩니다.</a:t>
             </a:r>
             <a:endParaRPr lang="en-US" sz="1500" dirty="0"/>
           </a:p>

--- a/VEXPLOR_AAS_Studio_user_manual.pptx
+++ b/VEXPLOR_AAS_Studio_user_manual.pptx
@@ -145,23 +145,23 @@
   <p:extLst>
     <p:ext uri="{521415D9-36F7-43E2-AB2F-B90AF26B5E84}">
       <p14:sectionLst xmlns:p14="http://schemas.microsoft.com/office/powerpoint/2010/main">
-        <p14:section name="표지" id="{df7b5bfb-b47a-e64a-c8e1-035443a17b54}">
+        <p14:section name="표지" id="{79c03d12-9077-826c-b035-3909b1be1e07}">
           <p14:sldIdLst>
             <p14:sldId id="256"/>
           </p14:sldIdLst>
         </p14:section>
-        <p14:section name="차례" id="{2bb05234-9e61-9c46-6578-6892a1b963ab}">
+        <p14:section name="차례" id="{bf7110be-39f4-9618-c0b8-a0b316dca0e0}">
           <p14:sldIdLst>
             <p14:sldId id="257"/>
           </p14:sldIdLst>
         </p14:section>
-        <p14:section name="소개" id="{fc5ed34e-214d-79bf-6f71-e83cb223234e}">
+        <p14:section name="소개" id="{09b7142b-68d2-41fd-b5d0-5450676243d4}">
           <p14:sldIdLst>
             <p14:sldId id="258"/>
             <p14:sldId id="259"/>
           </p14:sldIdLst>
         </p14:section>
-        <p14:section name="시작하기" id="{ff97b2a6-6019-9d36-c02e-0312f9b1ac05}">
+        <p14:section name="시작하기" id="{a9c5a5f5-eeca-ca31-9c3f-6a68b03df2ae}">
           <p14:sldIdLst>
             <p14:sldId id="260"/>
             <p14:sldId id="261"/>
@@ -169,7 +169,7 @@
             <p14:sldId id="263"/>
           </p14:sldIdLst>
         </p14:section>
-        <p14:section name="화면 둘러보기" id="{46d95589-4c12-a538-8db3-22a1a7ab8491}">
+        <p14:section name="화면 둘러보기" id="{25b2e2da-be95-ea26-9993-584d81cdb71c}">
           <p14:sldIdLst>
             <p14:sldId id="264"/>
             <p14:sldId id="265"/>
@@ -177,7 +177,7 @@
             <p14:sldId id="267"/>
           </p14:sldIdLst>
         </p14:section>
-        <p14:section name="파일 열기" id="{8ae0b903-56bc-1457-9583-22720024703f}">
+        <p14:section name="파일 열기" id="{e103c79a-fd1e-cb81-ffac-845f60535089}">
           <p14:sldIdLst>
             <p14:sldId id="268"/>
             <p14:sldId id="269"/>
@@ -185,7 +185,7 @@
             <p14:sldId id="271"/>
           </p14:sldIdLst>
         </p14:section>
-        <p14:section name="만들고 고치기" id="{0e294755-42b6-3d2e-baf8-fa349b0c0072}">
+        <p14:section name="만들고 고치기" id="{2a9301e1-de4e-514d-ae36-1b3484499d7e}">
           <p14:sldIdLst>
             <p14:sldId id="272"/>
             <p14:sldId id="273"/>
@@ -195,35 +195,35 @@
             <p14:sldId id="277"/>
           </p14:sldIdLst>
         </p14:section>
-        <p14:section name="검사와 자동 고치기" id="{2a2cc529-7601-83a0-0ef0-9474b3c27c93}">
+        <p14:section name="검사와 자동 고치기" id="{871f710c-b49e-d16b-b9d1-9f2c62fc1b8a}">
           <p14:sldIdLst>
             <p14:sldId id="278"/>
             <p14:sldId id="279"/>
             <p14:sldId id="280"/>
           </p14:sldIdLst>
         </p14:section>
-        <p14:section name="내보내기" id="{6908f703-c928-8940-f40c-648654f9ce0a}">
+        <p14:section name="내보내기" id="{9521c78d-8dfb-9d38-0a86-9d0508e2945f}">
           <p14:sldIdLst>
             <p14:sldId id="281"/>
             <p14:sldId id="282"/>
             <p14:sldId id="283"/>
           </p14:sldIdLst>
         </p14:section>
-        <p14:section name="공정과 레퍼런스 번들" id="{527558d5-31b1-aae5-b786-d8f933b2f13a}">
+        <p14:section name="공정과 레퍼런스 번들" id="{202090a3-6093-fb16-7d46-d5e009d65d0c}">
           <p14:sldIdLst>
             <p14:sldId id="284"/>
             <p14:sldId id="285"/>
             <p14:sldId id="286"/>
           </p14:sldIdLst>
         </p14:section>
-        <p14:section name="현장 값 수집과 제공" id="{65f5d439-5e58-37d4-f266-f2c15c80ed4a}">
+        <p14:section name="현장 값 수집과 제공" id="{e1445186-ee74-6786-6c4b-3b8f1ca67a04}">
           <p14:sldIdLst>
             <p14:sldId id="287"/>
             <p14:sldId id="288"/>
             <p14:sldId id="289"/>
           </p14:sldIdLst>
         </p14:section>
-        <p14:section name="내 계정과 설정" id="{bc426c36-be01-3eea-72c0-da3d8cf366b4}">
+        <p14:section name="내 계정과 설정" id="{2c9fe74d-f3ac-97a9-9749-83c58a7df93e}">
           <p14:sldIdLst>
             <p14:sldId id="290"/>
             <p14:sldId id="291"/>
@@ -231,7 +231,7 @@
             <p14:sldId id="293"/>
           </p14:sldIdLst>
         </p14:section>
-        <p14:section name="마무리" id="{ecfec13a-e237-8df8-38e9-fdabc534e0cc}">
+        <p14:section name="마무리" id="{f6376d41-c53a-e1de-edf8-7dce66a54cb8}">
           <p14:sldIdLst>
             <p14:sldId id="294"/>
           </p14:sldIdLst>

--- a/VEXPLOR_AAS_Studio_user_manual.pptx
+++ b/VEXPLOR_AAS_Studio_user_manual.pptx
@@ -44,9 +44,10 @@
     <p:sldId id="292" r:id="rId38"/>
     <p:sldId id="293" r:id="rId39"/>
     <p:sldId id="294" r:id="rId40"/>
+    <p:sldId id="295" r:id="rId41"/>
   </p:sldIdLst>
   <p:notesMasterIdLst>
-    <p:notesMasterId r:id="rId41"/>
+    <p:notesMasterId r:id="rId42"/>
   </p:notesMasterIdLst>
   <p:sldSz cx="12192000" cy="6858000"/>
   <p:notesSz cx="6858000" cy="12192000"/>
@@ -145,23 +146,23 @@
   <p:extLst>
     <p:ext uri="{521415D9-36F7-43E2-AB2F-B90AF26B5E84}">
       <p14:sectionLst xmlns:p14="http://schemas.microsoft.com/office/powerpoint/2010/main">
-        <p14:section name="표지" id="{79c03d12-9077-826c-b035-3909b1be1e07}">
+        <p14:section name="표지" id="{9a89b6de-7df5-d8e9-4cf6-3d9b72c5c59a}">
           <p14:sldIdLst>
             <p14:sldId id="256"/>
           </p14:sldIdLst>
         </p14:section>
-        <p14:section name="차례" id="{bf7110be-39f4-9618-c0b8-a0b316dca0e0}">
+        <p14:section name="차례" id="{c5338ce0-5227-b510-6575-617b15f68ba9}">
           <p14:sldIdLst>
             <p14:sldId id="257"/>
           </p14:sldIdLst>
         </p14:section>
-        <p14:section name="소개" id="{09b7142b-68d2-41fd-b5d0-5450676243d4}">
+        <p14:section name="소개" id="{798fbb91-7d13-28d5-6062-7ee89aa2195d}">
           <p14:sldIdLst>
             <p14:sldId id="258"/>
             <p14:sldId id="259"/>
           </p14:sldIdLst>
         </p14:section>
-        <p14:section name="시작하기" id="{a9c5a5f5-eeca-ca31-9c3f-6a68b03df2ae}">
+        <p14:section name="시작하기" id="{970250a8-09b9-5434-c7b7-b474a328279f}">
           <p14:sldIdLst>
             <p14:sldId id="260"/>
             <p14:sldId id="261"/>
@@ -169,7 +170,7 @@
             <p14:sldId id="263"/>
           </p14:sldIdLst>
         </p14:section>
-        <p14:section name="화면 둘러보기" id="{25b2e2da-be95-ea26-9993-584d81cdb71c}">
+        <p14:section name="화면 둘러보기" id="{2f02846f-4230-c995-b675-a329fc481178}">
           <p14:sldIdLst>
             <p14:sldId id="264"/>
             <p14:sldId id="265"/>
@@ -177,7 +178,7 @@
             <p14:sldId id="267"/>
           </p14:sldIdLst>
         </p14:section>
-        <p14:section name="파일 열기" id="{e103c79a-fd1e-cb81-ffac-845f60535089}">
+        <p14:section name="파일 열기" id="{fd8e1adc-1fd7-fc29-95ff-991534f16d3d}">
           <p14:sldIdLst>
             <p14:sldId id="268"/>
             <p14:sldId id="269"/>
@@ -185,7 +186,7 @@
             <p14:sldId id="271"/>
           </p14:sldIdLst>
         </p14:section>
-        <p14:section name="만들고 고치기" id="{2a9301e1-de4e-514d-ae36-1b3484499d7e}">
+        <p14:section name="만들고 고치기" id="{626e248f-1e6e-6a25-4beb-9a3a988a313f}">
           <p14:sldIdLst>
             <p14:sldId id="272"/>
             <p14:sldId id="273"/>
@@ -195,45 +196,46 @@
             <p14:sldId id="277"/>
           </p14:sldIdLst>
         </p14:section>
-        <p14:section name="검사와 자동 고치기" id="{871f710c-b49e-d16b-b9d1-9f2c62fc1b8a}">
+        <p14:section name="검사와 자동 고치기" id="{d61fd811-25e3-b314-1f35-853f69236583}">
           <p14:sldIdLst>
             <p14:sldId id="278"/>
             <p14:sldId id="279"/>
             <p14:sldId id="280"/>
           </p14:sldIdLst>
         </p14:section>
-        <p14:section name="내보내기" id="{9521c78d-8dfb-9d38-0a86-9d0508e2945f}">
+        <p14:section name="내보내기" id="{eb478de4-3ce2-8ff5-f733-fa8f01e7e65a}">
           <p14:sldIdLst>
             <p14:sldId id="281"/>
             <p14:sldId id="282"/>
             <p14:sldId id="283"/>
           </p14:sldIdLst>
         </p14:section>
-        <p14:section name="공정과 레퍼런스 번들" id="{202090a3-6093-fb16-7d46-d5e009d65d0c}">
+        <p14:section name="공정과 레퍼런스 번들" id="{2ff64610-9ba9-f0a1-daec-e305c614159b}">
           <p14:sldIdLst>
             <p14:sldId id="284"/>
             <p14:sldId id="285"/>
             <p14:sldId id="286"/>
           </p14:sldIdLst>
         </p14:section>
-        <p14:section name="현장 값 수집과 제공" id="{e1445186-ee74-6786-6c4b-3b8f1ca67a04}">
+        <p14:section name="현장 값 수집과 제공" id="{72434b13-d25e-ca65-1546-f25ce222920a}">
           <p14:sldIdLst>
             <p14:sldId id="287"/>
             <p14:sldId id="288"/>
             <p14:sldId id="289"/>
           </p14:sldIdLst>
         </p14:section>
-        <p14:section name="내 계정과 설정" id="{2c9fe74d-f3ac-97a9-9749-83c58a7df93e}">
+        <p14:section name="내 계정과 설정" id="{85254754-cf37-6958-d51c-acf2c8a5ee4f}">
           <p14:sldIdLst>
             <p14:sldId id="290"/>
             <p14:sldId id="291"/>
             <p14:sldId id="292"/>
             <p14:sldId id="293"/>
+            <p14:sldId id="294"/>
           </p14:sldIdLst>
         </p14:section>
-        <p14:section name="마무리" id="{f6376d41-c53a-e1de-edf8-7dce66a54cb8}">
+        <p14:section name="마무리" id="{6a46b0f5-1f65-a1e7-738c-cfe5dde35832}">
           <p14:sldIdLst>
-            <p14:sldId id="294"/>
+            <p14:sldId id="295"/>
           </p14:sldIdLst>
         </p14:section>
       </p14:sectionLst>
@@ -3568,6 +3570,94 @@
             <a:fld id="{F7021451-1387-4CA6-816F-3879F97B5CBC}" type="slidenum">
               <a:rPr lang="en-US"/>
               <a:t>4</a:t>
+            </a:fld>
+            <a:endParaRPr lang="en-US"/>
+          </a:p>
+        </p:txBody>
+      </p:sp>
+    </p:spTree>
+    <p:extLst>
+      <p:ext uri="{BB962C8B-B14F-4D97-AF65-F5344CB8AC3E}">
+        <p14:creationId xmlns:p14="http://schemas.microsoft.com/office/powerpoint/2010/main" val="1024086991"/>
+      </p:ext>
+    </p:extLst>
+  </p:cSld>
+  <p:clrMapOvr>
+    <a:masterClrMapping/>
+  </p:clrMapOvr>
+</p:notes>
+</file>
+
+<file path=ppt/notesSlides/notesSlide40.xml><?xml version="1.0" encoding="utf-8"?>
+<p:notes xmlns:a="http://schemas.openxmlformats.org/drawingml/2006/main" xmlns:r="http://schemas.openxmlformats.org/officeDocument/2006/relationships" xmlns:p="http://schemas.openxmlformats.org/presentationml/2006/main">
+  <p:cSld>
+    <p:spTree>
+      <p:nvGrpSpPr>
+        <p:cNvPr id="1" name=""/>
+        <p:cNvGrpSpPr/>
+        <p:nvPr/>
+      </p:nvGrpSpPr>
+      <p:grpSpPr>
+        <a:xfrm>
+          <a:off x="0" y="0"/>
+          <a:ext cx="0" cy="0"/>
+          <a:chOff x="0" y="0"/>
+          <a:chExt cx="0" cy="0"/>
+        </a:xfrm>
+      </p:grpSpPr>
+      <p:sp>
+        <p:nvSpPr>
+          <p:cNvPr id="2" name="Slide Image Placeholder 1"/>
+          <p:cNvSpPr>
+            <a:spLocks noGrp="1" noRot="1" noChangeAspect="1"/>
+          </p:cNvSpPr>
+          <p:nvPr>
+            <p:ph type="sldImg"/>
+          </p:nvPr>
+        </p:nvSpPr>
+        <p:spPr/>
+      </p:sp>
+      <p:sp>
+        <p:nvSpPr>
+          <p:cNvPr id="3" name="Notes Placeholder 2"/>
+          <p:cNvSpPr>
+            <a:spLocks noGrp="1"/>
+          </p:cNvSpPr>
+          <p:nvPr>
+            <p:ph type="body" idx="1"/>
+          </p:nvPr>
+        </p:nvSpPr>
+        <p:spPr/>
+        <p:txBody>
+          <a:bodyPr/>
+          <a:lstStyle/>
+          <a:p>
+            <a:r>
+              <a:rPr lang="en-US" dirty="0"/>
+              <a:t/>
+            </a:r>
+            <a:endParaRPr lang="en-US" dirty="0"/>
+          </a:p>
+        </p:txBody>
+      </p:sp>
+      <p:sp>
+        <p:nvSpPr>
+          <p:cNvPr id="4" name="Slide Number Placeholder 3"/>
+          <p:cNvSpPr>
+            <a:spLocks noGrp="1"/>
+          </p:cNvSpPr>
+          <p:nvPr>
+            <p:ph type="sldNum" sz="quarter" idx="10"/>
+          </p:nvPr>
+        </p:nvSpPr>
+        <p:spPr/>
+        <p:txBody>
+          <a:bodyPr/>
+          <a:lstStyle/>
+          <a:p>
+            <a:fld id="{F7021451-1387-4CA6-816F-3879F97B5CBC}" type="slidenum">
+              <a:rPr lang="en-US"/>
+              <a:t>40</a:t>
             </a:fld>
             <a:endParaRPr lang="en-US"/>
           </a:p>
@@ -12659,7 +12749,7 @@
                 <a:ea typeface="Malgun Gothic" pitchFamily="34" charset="-122"/>
                 <a:cs typeface="Malgun Gothic" pitchFamily="34" charset="-120"/>
               </a:rPr>
-              <a:t>체험 계정  </a:t>
+              <a:t>데모 계정  </a:t>
             </a:r>
             <a:pPr indent="0" marL="0">
               <a:buNone/>
@@ -16491,7 +16581,7 @@
                 <a:ea typeface="Malgun Gothic" pitchFamily="34" charset="-122"/>
                 <a:cs typeface="Malgun Gothic" pitchFamily="34" charset="-120"/>
               </a:rPr>
-              <a:t>로그인 · 회원가입 · 체험 계정</a:t>
+              <a:t>로그인 · 회원가입 · 데모 계정</a:t>
             </a:r>
             <a:endParaRPr lang="en-US" sz="1600" dirty="0"/>
           </a:p>
@@ -25409,7 +25499,7 @@
                 <a:ea typeface="Malgun Gothic" pitchFamily="34" charset="-122"/>
                 <a:cs typeface="Malgun Gothic" pitchFamily="34" charset="-120"/>
               </a:rPr>
-              <a:t>체험 계정이면 🔒</a:t>
+              <a:t>데모 계정이면 🔒</a:t>
             </a:r>
             <a:endParaRPr lang="en-US" sz="1450" dirty="0"/>
           </a:p>
@@ -31235,7 +31325,7 @@
                 <a:ea typeface="Malgun Gothic" pitchFamily="34" charset="-122"/>
                 <a:cs typeface="Malgun Gothic" pitchFamily="34" charset="-120"/>
               </a:rPr>
-              <a:t>비밀번호 · 언어 · 탈퇴 · 자주 묻는 질문</a:t>
+              <a:t>내 계정 설정 · 언어 · 탈퇴 · 자주 묻는 질문</a:t>
             </a:r>
             <a:endParaRPr lang="en-US" sz="1700" dirty="0"/>
           </a:p>
@@ -31463,8 +31553,8 @@
         </p:nvSpPr>
         <p:spPr>
           <a:xfrm>
-            <a:off x="732571" y="1645920"/>
-            <a:ext cx="2923978" cy="3566160"/>
+            <a:off x="716105" y="1645920"/>
+            <a:ext cx="2774030" cy="3383280"/>
           </a:xfrm>
           <a:prstGeom prst="rect">
             <a:avLst/>
@@ -31503,8 +31593,8 @@
         </p:blipFill>
         <p:spPr>
           <a:xfrm>
-            <a:off x="732571" y="1645920"/>
-            <a:ext cx="2923978" cy="3566160"/>
+            <a:off x="716105" y="1645920"/>
+            <a:ext cx="2774030" cy="3383280"/>
           </a:xfrm>
           <a:prstGeom prst="rect">
             <a:avLst/>
@@ -31519,12 +31609,12 @@
         </p:nvSpPr>
         <p:spPr>
           <a:xfrm>
-            <a:off x="932846" y="2802636"/>
-            <a:ext cx="2523429" cy="569556"/>
+            <a:off x="904468" y="2741676"/>
+            <a:ext cx="2397305" cy="543630"/>
           </a:xfrm>
           <a:prstGeom prst="roundRect">
             <a:avLst>
-              <a:gd name="adj" fmla="val 6422"/>
+              <a:gd name="adj" fmla="val 6728"/>
             </a:avLst>
           </a:prstGeom>
           <a:ln w="28575">
@@ -31543,7 +31633,7 @@
         </p:nvSpPr>
         <p:spPr>
           <a:xfrm>
-            <a:off x="786542" y="2656332"/>
+            <a:off x="758164" y="2595372"/>
             <a:ext cx="292608" cy="292608"/>
           </a:xfrm>
           <a:prstGeom prst="ellipse">
@@ -31568,7 +31658,7 @@
         </p:nvSpPr>
         <p:spPr>
           <a:xfrm>
-            <a:off x="786542" y="2656332"/>
+            <a:off x="758164" y="2595372"/>
             <a:ext cx="292608" cy="292608"/>
           </a:xfrm>
           <a:prstGeom prst="rect">
@@ -31607,12 +31697,12 @@
         </p:nvSpPr>
         <p:spPr>
           <a:xfrm>
-            <a:off x="932846" y="3362837"/>
-            <a:ext cx="2523429" cy="569556"/>
+            <a:off x="904468" y="3273149"/>
+            <a:ext cx="2397305" cy="543630"/>
           </a:xfrm>
           <a:prstGeom prst="roundRect">
             <a:avLst>
-              <a:gd name="adj" fmla="val 6422"/>
+              <a:gd name="adj" fmla="val 6728"/>
             </a:avLst>
           </a:prstGeom>
           <a:ln w="28575">
@@ -31631,7 +31721,7 @@
         </p:nvSpPr>
         <p:spPr>
           <a:xfrm>
-            <a:off x="786542" y="3216533"/>
+            <a:off x="758164" y="3126845"/>
             <a:ext cx="292608" cy="292608"/>
           </a:xfrm>
           <a:prstGeom prst="ellipse">
@@ -31656,7 +31746,7 @@
         </p:nvSpPr>
         <p:spPr>
           <a:xfrm>
-            <a:off x="786542" y="3216533"/>
+            <a:off x="758164" y="3126845"/>
             <a:ext cx="292608" cy="292608"/>
           </a:xfrm>
           <a:prstGeom prst="rect">
@@ -31695,12 +31785,12 @@
         </p:nvSpPr>
         <p:spPr>
           <a:xfrm>
-            <a:off x="932846" y="3868385"/>
-            <a:ext cx="2523429" cy="528565"/>
+            <a:off x="904468" y="3752771"/>
+            <a:ext cx="2397305" cy="504742"/>
           </a:xfrm>
           <a:prstGeom prst="roundRect">
             <a:avLst>
-              <a:gd name="adj" fmla="val 6920"/>
+              <a:gd name="adj" fmla="val 7246"/>
             </a:avLst>
           </a:prstGeom>
           <a:ln w="28575">
@@ -31719,7 +31809,7 @@
         </p:nvSpPr>
         <p:spPr>
           <a:xfrm>
-            <a:off x="786542" y="3722081"/>
+            <a:off x="758164" y="3606467"/>
             <a:ext cx="292608" cy="292608"/>
           </a:xfrm>
           <a:prstGeom prst="ellipse">
@@ -31744,7 +31834,7 @@
         </p:nvSpPr>
         <p:spPr>
           <a:xfrm>
-            <a:off x="786542" y="3722081"/>
+            <a:off x="758164" y="3606467"/>
             <a:ext cx="292608" cy="292608"/>
           </a:xfrm>
           <a:prstGeom prst="rect">
@@ -31777,69 +31867,13 @@
       </p:sp>
       <p:sp>
         <p:nvSpPr>
-          <p:cNvPr id="17" name="frame-648"/>
+          <p:cNvPr id="17" name="step-648"/>
           <p:cNvSpPr/>
           <p:nvPr/>
         </p:nvSpPr>
         <p:spPr>
           <a:xfrm>
-            <a:off x="4114800" y="2511987"/>
-            <a:ext cx="3566160" cy="1834025"/>
-          </a:xfrm>
-          <a:prstGeom prst="rect">
-            <a:avLst/>
-          </a:prstGeom>
-          <a:solidFill>
-            <a:srgbClr val="0F1B2D"/>
-          </a:solidFill>
-          <a:ln w="9525">
-            <a:solidFill>
-              <a:srgbClr val="C9D2DE"/>
-            </a:solidFill>
-            <a:prstDash val="solid"/>
-          </a:ln>
-          <a:effectLst>
-            <a:outerShdw sx="100000" sy="100000" kx="0" ky="0" algn="bl" rotWithShape="0" blurRad="127000" dist="38100" dir="5400000">
-              <a:srgbClr val="0F1B2D">
-                <a:alpha val="18000"/>
-              </a:srgbClr>
-            </a:outerShdw>
-          </a:effectLst>
-        </p:spPr>
-      </p:sp>
-      <p:pic>
-        <p:nvPicPr>
-          <p:cNvPr id="18" name="screen-649" descr="화면: b-password">    </p:cNvPr>
-          <p:cNvPicPr>
-            <a:picLocks noChangeAspect="1"/>
-          </p:cNvPicPr>
-          <p:nvPr/>
-        </p:nvPicPr>
-        <p:blipFill>
-          <a:blip r:embed="rId2"/>
-          <a:stretch>
-            <a:fillRect/>
-          </a:stretch>
-        </p:blipFill>
-        <p:spPr>
-          <a:xfrm>
-            <a:off x="4114800" y="2511987"/>
-            <a:ext cx="3566160" cy="1834025"/>
-          </a:xfrm>
-          <a:prstGeom prst="rect">
-            <a:avLst/>
-          </a:prstGeom>
-        </p:spPr>
-      </p:pic>
-      <p:sp>
-        <p:nvSpPr>
-          <p:cNvPr id="19" name="step-650"/>
-          <p:cNvSpPr/>
-          <p:nvPr/>
-        </p:nvSpPr>
-        <p:spPr>
-          <a:xfrm>
-            <a:off x="8001000" y="1783080"/>
+            <a:off x="4023360" y="1783080"/>
             <a:ext cx="329184" cy="329184"/>
           </a:xfrm>
           <a:prstGeom prst="ellipse">
@@ -31858,13 +31892,13 @@
       </p:sp>
       <p:sp>
         <p:nvSpPr>
-          <p:cNvPr id="20" name="t-651"/>
+          <p:cNvPr id="18" name="t-649"/>
           <p:cNvSpPr txBox="1"/>
           <p:nvPr/>
         </p:nvSpPr>
         <p:spPr>
           <a:xfrm>
-            <a:off x="8001000" y="1783080"/>
+            <a:off x="4023360" y="1783080"/>
             <a:ext cx="329184" cy="329184"/>
           </a:xfrm>
           <a:prstGeom prst="rect">
@@ -31897,14 +31931,14 @@
       </p:sp>
       <p:sp>
         <p:nvSpPr>
-          <p:cNvPr id="21" name="t-652"/>
+          <p:cNvPr id="19" name="t-650"/>
           <p:cNvSpPr txBox="1"/>
           <p:nvPr/>
         </p:nvSpPr>
         <p:spPr>
           <a:xfrm>
-            <a:off x="8476488" y="1737360"/>
-            <a:ext cx="3136392" cy="1234440"/>
+            <a:off x="4498848" y="1737360"/>
+            <a:ext cx="7114032" cy="1097280"/>
           </a:xfrm>
           <a:prstGeom prst="rect">
             <a:avLst/>
@@ -31923,7 +31957,7 @@
               <a:buNone/>
             </a:pPr>
             <a:r>
-              <a:rPr lang="en-US" sz="1400" b="1" dirty="0">
+              <a:rPr lang="en-US" sz="1500" b="1" dirty="0">
                 <a:solidFill>
                   <a:srgbClr val="0F1B2D"/>
                 </a:solidFill>
@@ -31931,9 +31965,9 @@
                 <a:ea typeface="Malgun Gothic" pitchFamily="34" charset="-122"/>
                 <a:cs typeface="Malgun Gothic" pitchFamily="34" charset="-120"/>
               </a:rPr>
-              <a:t>내 비밀번호 바꾸기</a:t>
-            </a:r>
-            <a:endParaRPr lang="en-US" sz="1400" dirty="0"/>
+              <a:t>내 계정 설정</a:t>
+            </a:r>
+            <a:endParaRPr lang="en-US" sz="1500" dirty="0"/>
           </a:p>
           <a:p>
             <a:pPr indent="0" marL="0">
@@ -31943,7 +31977,7 @@
               <a:buNone/>
             </a:pPr>
             <a:r>
-              <a:rPr lang="en-US" sz="1150" dirty="0">
+              <a:rPr lang="en-US" sz="1250" dirty="0">
                 <a:solidFill>
                   <a:srgbClr val="4B5563"/>
                 </a:solidFill>
@@ -31951,21 +31985,21 @@
                 <a:ea typeface="Malgun Gothic" pitchFamily="34" charset="-122"/>
                 <a:cs typeface="Malgun Gothic" pitchFamily="34" charset="-120"/>
               </a:rPr>
-              <a:t>지금 비밀번호와 새 비밀번호(10자 이상)를 입력합니다. 바꾸면 다른 곳의 로그인은 끊깁니다.</a:t>
-            </a:r>
-            <a:endParaRPr lang="en-US" sz="1400" dirty="0"/>
-          </a:p>
-        </p:txBody>
-      </p:sp>
-      <p:sp>
-        <p:nvSpPr>
-          <p:cNvPr id="22" name="step-653"/>
+              <a:t>내 이름 · 회사명 · 이메일과 비밀번호를 바꿉니다(다음 쪽).</a:t>
+            </a:r>
+            <a:endParaRPr lang="en-US" sz="1500" dirty="0"/>
+          </a:p>
+        </p:txBody>
+      </p:sp>
+      <p:sp>
+        <p:nvSpPr>
+          <p:cNvPr id="20" name="step-651"/>
           <p:cNvSpPr/>
           <p:nvPr/>
         </p:nvSpPr>
         <p:spPr>
           <a:xfrm>
-            <a:off x="8001000" y="3063240"/>
+            <a:off x="4023360" y="2926080"/>
             <a:ext cx="329184" cy="329184"/>
           </a:xfrm>
           <a:prstGeom prst="ellipse">
@@ -31984,13 +32018,13 @@
       </p:sp>
       <p:sp>
         <p:nvSpPr>
-          <p:cNvPr id="23" name="t-654"/>
+          <p:cNvPr id="21" name="t-652"/>
           <p:cNvSpPr txBox="1"/>
           <p:nvPr/>
         </p:nvSpPr>
         <p:spPr>
           <a:xfrm>
-            <a:off x="8001000" y="3063240"/>
+            <a:off x="4023360" y="2926080"/>
             <a:ext cx="329184" cy="329184"/>
           </a:xfrm>
           <a:prstGeom prst="rect">
@@ -32023,14 +32057,14 @@
       </p:sp>
       <p:sp>
         <p:nvSpPr>
-          <p:cNvPr id="24" name="t-655"/>
+          <p:cNvPr id="22" name="t-653"/>
           <p:cNvSpPr txBox="1"/>
           <p:nvPr/>
         </p:nvSpPr>
         <p:spPr>
           <a:xfrm>
-            <a:off x="8476488" y="3017520"/>
-            <a:ext cx="3136392" cy="1234440"/>
+            <a:off x="4498848" y="2880360"/>
+            <a:ext cx="7114032" cy="1097280"/>
           </a:xfrm>
           <a:prstGeom prst="rect">
             <a:avLst/>
@@ -32049,7 +32083,7 @@
               <a:buNone/>
             </a:pPr>
             <a:r>
-              <a:rPr lang="en-US" sz="1400" b="1" dirty="0">
+              <a:rPr lang="en-US" sz="1500" b="1" dirty="0">
                 <a:solidFill>
                   <a:srgbClr val="0F1B2D"/>
                 </a:solidFill>
@@ -32059,7 +32093,7 @@
               </a:rPr>
               <a:t>로그아웃</a:t>
             </a:r>
-            <a:endParaRPr lang="en-US" sz="1400" dirty="0"/>
+            <a:endParaRPr lang="en-US" sz="1500" dirty="0"/>
           </a:p>
           <a:p>
             <a:pPr indent="0" marL="0">
@@ -32069,7 +32103,7 @@
               <a:buNone/>
             </a:pPr>
             <a:r>
-              <a:rPr lang="en-US" sz="1150" dirty="0">
+              <a:rPr lang="en-US" sz="1250" dirty="0">
                 <a:solidFill>
                   <a:srgbClr val="4B5563"/>
                 </a:solidFill>
@@ -32079,19 +32113,19 @@
               </a:rPr>
               <a:t>공용 PC에서는 꼭 로그아웃하세요.</a:t>
             </a:r>
-            <a:endParaRPr lang="en-US" sz="1400" dirty="0"/>
-          </a:p>
-        </p:txBody>
-      </p:sp>
-      <p:sp>
-        <p:nvSpPr>
-          <p:cNvPr id="25" name="step-656"/>
+            <a:endParaRPr lang="en-US" sz="1500" dirty="0"/>
+          </a:p>
+        </p:txBody>
+      </p:sp>
+      <p:sp>
+        <p:nvSpPr>
+          <p:cNvPr id="23" name="step-654"/>
           <p:cNvSpPr/>
           <p:nvPr/>
         </p:nvSpPr>
         <p:spPr>
           <a:xfrm>
-            <a:off x="8001000" y="4343400"/>
+            <a:off x="4023360" y="4069080"/>
             <a:ext cx="329184" cy="329184"/>
           </a:xfrm>
           <a:prstGeom prst="ellipse">
@@ -32110,13 +32144,13 @@
       </p:sp>
       <p:sp>
         <p:nvSpPr>
-          <p:cNvPr id="26" name="t-657"/>
+          <p:cNvPr id="24" name="t-655"/>
           <p:cNvSpPr txBox="1"/>
           <p:nvPr/>
         </p:nvSpPr>
         <p:spPr>
           <a:xfrm>
-            <a:off x="8001000" y="4343400"/>
+            <a:off x="4023360" y="4069080"/>
             <a:ext cx="329184" cy="329184"/>
           </a:xfrm>
           <a:prstGeom prst="rect">
@@ -32149,14 +32183,14 @@
       </p:sp>
       <p:sp>
         <p:nvSpPr>
-          <p:cNvPr id="27" name="t-658"/>
+          <p:cNvPr id="25" name="t-656"/>
           <p:cNvSpPr txBox="1"/>
           <p:nvPr/>
         </p:nvSpPr>
         <p:spPr>
           <a:xfrm>
-            <a:off x="8476488" y="4297680"/>
-            <a:ext cx="3136392" cy="1234440"/>
+            <a:off x="4498848" y="4023360"/>
+            <a:ext cx="7114032" cy="1097280"/>
           </a:xfrm>
           <a:prstGeom prst="rect">
             <a:avLst/>
@@ -32175,7 +32209,7 @@
               <a:buNone/>
             </a:pPr>
             <a:r>
-              <a:rPr lang="en-US" sz="1400" b="1" dirty="0">
+              <a:rPr lang="en-US" sz="1500" b="1" dirty="0">
                 <a:solidFill>
                   <a:srgbClr val="0F1B2D"/>
                 </a:solidFill>
@@ -32185,7 +32219,7 @@
               </a:rPr>
               <a:t>탈퇴 — 계정 지우기</a:t>
             </a:r>
-            <a:endParaRPr lang="en-US" sz="1400" dirty="0"/>
+            <a:endParaRPr lang="en-US" sz="1500" dirty="0"/>
           </a:p>
           <a:p>
             <a:pPr indent="0" marL="0">
@@ -32195,7 +32229,7 @@
               <a:buNone/>
             </a:pPr>
             <a:r>
-              <a:rPr lang="en-US" sz="1150" dirty="0">
+              <a:rPr lang="en-US" sz="1250" dirty="0">
                 <a:solidFill>
                   <a:srgbClr val="4B5563"/>
                 </a:solidFill>
@@ -32205,20 +32239,20 @@
               </a:rPr>
               <a:t>계정과 올린 파일이 바로 삭제되며 되돌릴 수 없습니다.</a:t>
             </a:r>
-            <a:endParaRPr lang="en-US" sz="1400" dirty="0"/>
-          </a:p>
-        </p:txBody>
-      </p:sp>
-      <p:sp>
-        <p:nvSpPr>
-          <p:cNvPr id="28" name="note-659"/>
+            <a:endParaRPr lang="en-US" sz="1500" dirty="0"/>
+          </a:p>
+        </p:txBody>
+      </p:sp>
+      <p:sp>
+        <p:nvSpPr>
+          <p:cNvPr id="26" name="note-657"/>
           <p:cNvSpPr/>
           <p:nvPr/>
         </p:nvSpPr>
         <p:spPr>
           <a:xfrm>
-            <a:off x="548640" y="5486400"/>
-            <a:ext cx="7132320" cy="548640"/>
+            <a:off x="4023360" y="5349240"/>
+            <a:ext cx="7589520" cy="548640"/>
           </a:xfrm>
           <a:prstGeom prst="rect">
             <a:avLst/>
@@ -32236,13 +32270,13 @@
       </p:sp>
       <p:sp>
         <p:nvSpPr>
-          <p:cNvPr id="29" name="notebar-660"/>
+          <p:cNvPr id="27" name="notebar-658"/>
           <p:cNvSpPr/>
           <p:nvPr/>
         </p:nvSpPr>
         <p:spPr>
           <a:xfrm>
-            <a:off x="548640" y="5486400"/>
+            <a:off x="4023360" y="5349240"/>
             <a:ext cx="64008" cy="548640"/>
           </a:xfrm>
           <a:prstGeom prst="rect">
@@ -32261,14 +32295,14 @@
       </p:sp>
       <p:sp>
         <p:nvSpPr>
-          <p:cNvPr id="30" name="t-661"/>
+          <p:cNvPr id="28" name="t-659"/>
           <p:cNvSpPr txBox="1"/>
           <p:nvPr/>
         </p:nvSpPr>
         <p:spPr>
           <a:xfrm>
-            <a:off x="777240" y="5486400"/>
-            <a:ext cx="6766560" cy="548640"/>
+            <a:off x="4251960" y="5349240"/>
+            <a:ext cx="7223760" cy="548640"/>
           </a:xfrm>
           <a:prstGeom prst="rect">
             <a:avLst/>
@@ -32387,7 +32421,7 @@
       </p:grpSpPr>
       <p:sp>
         <p:nvSpPr>
-          <p:cNvPr id="2" name="bar-662"/>
+          <p:cNvPr id="2" name="bar-660"/>
           <p:cNvSpPr/>
           <p:nvPr/>
         </p:nvSpPr>
@@ -32412,7 +32446,7 @@
       </p:sp>
       <p:sp>
         <p:nvSpPr>
-          <p:cNvPr id="3" name="t-663"/>
+          <p:cNvPr id="3" name="t-661"/>
           <p:cNvSpPr txBox="1"/>
           <p:nvPr/>
         </p:nvSpPr>
@@ -32481,7 +32515,7 @@
                   <a:srgbClr val="0F1B2D"/>
                 </a:solidFill>
               </a:rPr>
-              <a:t>언어 · 검사 규칙 보기</a:t>
+              <a:t>내 계정 설정</a:t>
             </a:r>
             <a:endParaRPr lang="en-US" sz="2600" dirty="0"/>
           </a:p>
@@ -32489,7 +32523,7 @@
       </p:sp>
       <p:sp>
         <p:nvSpPr>
-          <p:cNvPr id="5" name="t-664"/>
+          <p:cNvPr id="5" name="t-662"/>
           <p:cNvSpPr txBox="1"/>
           <p:nvPr/>
         </p:nvSpPr>
@@ -32520,7 +32554,7 @@
                 <a:ea typeface="Malgun Gothic" pitchFamily="34" charset="-122"/>
                 <a:cs typeface="Malgun Gothic" pitchFamily="34" charset="-120"/>
               </a:rPr>
-              <a:t>설정 ▾ → 언어 / 규칙과 규약 보기</a:t>
+              <a:t>설정 ▾ → 내 계정 설정</a:t>
             </a:r>
             <a:endParaRPr lang="en-US" sz="1400" dirty="0"/>
           </a:p>
@@ -32528,14 +32562,14 @@
       </p:sp>
       <p:sp>
         <p:nvSpPr>
-          <p:cNvPr id="6" name="frame-665"/>
+          <p:cNvPr id="6" name="frame-663"/>
           <p:cNvSpPr/>
           <p:nvPr/>
         </p:nvSpPr>
         <p:spPr>
           <a:xfrm>
-            <a:off x="548640" y="1666897"/>
-            <a:ext cx="5120640" cy="2244045"/>
+            <a:off x="1100114" y="1645920"/>
+            <a:ext cx="2188892" cy="4617720"/>
           </a:xfrm>
           <a:prstGeom prst="rect">
             <a:avLst/>
@@ -32560,7 +32594,7 @@
       </p:sp>
       <p:pic>
         <p:nvPicPr>
-          <p:cNvPr id="7" name="screen-666" descr="화면: a-lang">    </p:cNvPr>
+          <p:cNvPr id="7" name="screen-664" descr="화면: b-myaccount">    </p:cNvPr>
           <p:cNvPicPr>
             <a:picLocks noChangeAspect="1"/>
           </p:cNvPicPr>
@@ -32574,8 +32608,8 @@
         </p:blipFill>
         <p:spPr>
           <a:xfrm>
-            <a:off x="548640" y="1666897"/>
-            <a:ext cx="5120640" cy="2244045"/>
+            <a:off x="1100114" y="1645920"/>
+            <a:ext cx="2188892" cy="4617720"/>
           </a:xfrm>
           <a:prstGeom prst="rect">
             <a:avLst/>
@@ -32584,70 +32618,63 @@
       </p:pic>
       <p:sp>
         <p:nvSpPr>
-          <p:cNvPr id="8" name="frame-667"/>
+          <p:cNvPr id="8" name="mark-665"/>
           <p:cNvSpPr/>
           <p:nvPr/>
         </p:nvSpPr>
         <p:spPr>
           <a:xfrm>
-            <a:off x="6080760" y="1645920"/>
-            <a:ext cx="5486400" cy="4114800"/>
-          </a:xfrm>
-          <a:prstGeom prst="rect">
-            <a:avLst/>
-          </a:prstGeom>
-          <a:solidFill>
-            <a:srgbClr val="0F1B2D"/>
-          </a:solidFill>
-          <a:ln w="9525">
+            <a:off x="1181764" y="2169558"/>
+            <a:ext cx="2025592" cy="1920357"/>
+          </a:xfrm>
+          <a:prstGeom prst="roundRect">
+            <a:avLst>
+              <a:gd name="adj" fmla="val 1905"/>
+            </a:avLst>
+          </a:prstGeom>
+          <a:ln w="28575">
             <a:solidFill>
-              <a:srgbClr val="C9D2DE"/>
+              <a:srgbClr val="F59E0B"/>
             </a:solidFill>
             <a:prstDash val="solid"/>
           </a:ln>
-          <a:effectLst>
-            <a:outerShdw sx="100000" sy="100000" kx="0" ky="0" algn="bl" rotWithShape="0" blurRad="127000" dist="38100" dir="5400000">
-              <a:srgbClr val="0F1B2D">
-                <a:alpha val="18000"/>
-              </a:srgbClr>
-            </a:outerShdw>
-          </a:effectLst>
-        </p:spPr>
-      </p:sp>
-      <p:pic>
-        <p:nvPicPr>
-          <p:cNvPr id="9" name="screen-668" descr="화면: a-rules">    </p:cNvPr>
-          <p:cNvPicPr>
-            <a:picLocks noChangeAspect="1"/>
-          </p:cNvPicPr>
-          <p:nvPr/>
-        </p:nvPicPr>
-        <p:blipFill>
-          <a:blip r:embed="rId2"/>
-          <a:stretch>
-            <a:fillRect/>
-          </a:stretch>
-        </p:blipFill>
-        <p:spPr>
-          <a:xfrm>
-            <a:off x="6080760" y="1645920"/>
-            <a:ext cx="5486400" cy="4114800"/>
-          </a:xfrm>
-          <a:prstGeom prst="rect">
-            <a:avLst/>
-          </a:prstGeom>
-        </p:spPr>
-      </p:pic>
-      <p:sp>
-        <p:nvSpPr>
-          <p:cNvPr id="10" name="t-669"/>
+        </p:spPr>
+      </p:sp>
+      <p:sp>
+        <p:nvSpPr>
+          <p:cNvPr id="9" name="markdot-666"/>
+          <p:cNvSpPr/>
+          <p:nvPr/>
+        </p:nvSpPr>
+        <p:spPr>
+          <a:xfrm>
+            <a:off x="1035460" y="2023254"/>
+            <a:ext cx="292608" cy="292608"/>
+          </a:xfrm>
+          <a:prstGeom prst="ellipse">
+            <a:avLst/>
+          </a:prstGeom>
+          <a:solidFill>
+            <a:srgbClr val="F59E0B"/>
+          </a:solidFill>
+          <a:ln w="15875">
+            <a:solidFill>
+              <a:srgbClr val="FFFFFF"/>
+            </a:solidFill>
+            <a:prstDash val="solid"/>
+          </a:ln>
+        </p:spPr>
+      </p:sp>
+      <p:sp>
+        <p:nvSpPr>
+          <p:cNvPr id="10" name="t-667"/>
           <p:cNvSpPr txBox="1"/>
           <p:nvPr/>
         </p:nvSpPr>
         <p:spPr>
           <a:xfrm>
-            <a:off x="548640" y="4041648"/>
-            <a:ext cx="5120640" cy="292608"/>
+            <a:off x="1035460" y="2023254"/>
+            <a:ext cx="292608" cy="292608"/>
           </a:xfrm>
           <a:prstGeom prst="rect">
             <a:avLst/>
@@ -32663,30 +32690,79 @@
               <a:buNone/>
             </a:pPr>
             <a:r>
-              <a:rPr lang="en-US" sz="1150" dirty="0">
-                <a:solidFill>
-                  <a:srgbClr val="8A94A6"/>
-                </a:solidFill>
-                <a:latin typeface="Malgun Gothic" pitchFamily="34" charset="0"/>
-                <a:ea typeface="Malgun Gothic" pitchFamily="34" charset="-122"/>
-                <a:cs typeface="Malgun Gothic" pitchFamily="34" charset="-120"/>
-              </a:rPr>
-              <a:t>언어 — 한국어 / English (이 브라우저에만 저장)</a:t>
-            </a:r>
-            <a:endParaRPr lang="en-US" sz="1150" dirty="0"/>
-          </a:p>
-        </p:txBody>
-      </p:sp>
-      <p:sp>
-        <p:nvSpPr>
-          <p:cNvPr id="11" name="t-670"/>
+              <a:rPr lang="en-US" sz="1100" b="1" dirty="0">
+                <a:solidFill>
+                  <a:srgbClr val="FFFFFF"/>
+                </a:solidFill>
+                <a:latin typeface="Malgun Gothic" pitchFamily="34" charset="0"/>
+                <a:ea typeface="Malgun Gothic" pitchFamily="34" charset="-122"/>
+                <a:cs typeface="Malgun Gothic" pitchFamily="34" charset="-120"/>
+              </a:rPr>
+              <a:t>1</a:t>
+            </a:r>
+            <a:endParaRPr lang="en-US" sz="1100" dirty="0"/>
+          </a:p>
+        </p:txBody>
+      </p:sp>
+      <p:sp>
+        <p:nvSpPr>
+          <p:cNvPr id="11" name="mark-668"/>
+          <p:cNvSpPr/>
+          <p:nvPr/>
+        </p:nvSpPr>
+        <p:spPr>
+          <a:xfrm>
+            <a:off x="1270162" y="3819646"/>
+            <a:ext cx="274478" cy="198709"/>
+          </a:xfrm>
+          <a:prstGeom prst="roundRect">
+            <a:avLst>
+              <a:gd name="adj" fmla="val 18407"/>
+            </a:avLst>
+          </a:prstGeom>
+          <a:ln w="28575">
+            <a:solidFill>
+              <a:srgbClr val="F59E0B"/>
+            </a:solidFill>
+            <a:prstDash val="solid"/>
+          </a:ln>
+        </p:spPr>
+      </p:sp>
+      <p:sp>
+        <p:nvSpPr>
+          <p:cNvPr id="12" name="markdot-669"/>
+          <p:cNvSpPr/>
+          <p:nvPr/>
+        </p:nvSpPr>
+        <p:spPr>
+          <a:xfrm>
+            <a:off x="1123858" y="3673342"/>
+            <a:ext cx="292608" cy="292608"/>
+          </a:xfrm>
+          <a:prstGeom prst="ellipse">
+            <a:avLst/>
+          </a:prstGeom>
+          <a:solidFill>
+            <a:srgbClr val="F59E0B"/>
+          </a:solidFill>
+          <a:ln w="15875">
+            <a:solidFill>
+              <a:srgbClr val="FFFFFF"/>
+            </a:solidFill>
+            <a:prstDash val="solid"/>
+          </a:ln>
+        </p:spPr>
+      </p:sp>
+      <p:sp>
+        <p:nvSpPr>
+          <p:cNvPr id="13" name="t-670"/>
           <p:cNvSpPr txBox="1"/>
           <p:nvPr/>
         </p:nvSpPr>
         <p:spPr>
           <a:xfrm>
-            <a:off x="6035040" y="5852160"/>
-            <a:ext cx="5577840" cy="292608"/>
+            <a:off x="1123858" y="3673342"/>
+            <a:ext cx="292608" cy="292608"/>
           </a:xfrm>
           <a:prstGeom prst="rect">
             <a:avLst/>
@@ -32702,40 +32778,128 @@
               <a:buNone/>
             </a:pPr>
             <a:r>
-              <a:rPr lang="en-US" sz="1150" dirty="0">
-                <a:solidFill>
-                  <a:srgbClr val="8A94A6"/>
-                </a:solidFill>
-                <a:latin typeface="Malgun Gothic" pitchFamily="34" charset="0"/>
-                <a:ea typeface="Malgun Gothic" pitchFamily="34" charset="-122"/>
-                <a:cs typeface="Malgun Gothic" pitchFamily="34" charset="-120"/>
-              </a:rPr>
-              <a:t>검사 규칙 43종과 작성 규약</a:t>
-            </a:r>
-            <a:endParaRPr lang="en-US" sz="1150" dirty="0"/>
-          </a:p>
-        </p:txBody>
-      </p:sp>
-      <p:sp>
-        <p:nvSpPr>
-          <p:cNvPr id="12" name="note-671"/>
+              <a:rPr lang="en-US" sz="1100" b="1" dirty="0">
+                <a:solidFill>
+                  <a:srgbClr val="FFFFFF"/>
+                </a:solidFill>
+                <a:latin typeface="Malgun Gothic" pitchFamily="34" charset="0"/>
+                <a:ea typeface="Malgun Gothic" pitchFamily="34" charset="-122"/>
+                <a:cs typeface="Malgun Gothic" pitchFamily="34" charset="-120"/>
+              </a:rPr>
+              <a:t>2</a:t>
+            </a:r>
+            <a:endParaRPr lang="en-US" sz="1100" dirty="0"/>
+          </a:p>
+        </p:txBody>
+      </p:sp>
+      <p:sp>
+        <p:nvSpPr>
+          <p:cNvPr id="14" name="mark-671"/>
           <p:cNvSpPr/>
           <p:nvPr/>
         </p:nvSpPr>
         <p:spPr>
           <a:xfrm>
-            <a:off x="548640" y="4572000"/>
-            <a:ext cx="5120640" cy="731520"/>
-          </a:xfrm>
-          <a:prstGeom prst="rect">
+            <a:off x="1181764" y="4270052"/>
+            <a:ext cx="2025592" cy="1693049"/>
+          </a:xfrm>
+          <a:prstGeom prst="roundRect">
+            <a:avLst>
+              <a:gd name="adj" fmla="val 2160"/>
+            </a:avLst>
+          </a:prstGeom>
+          <a:ln w="28575">
+            <a:solidFill>
+              <a:srgbClr val="F59E0B"/>
+            </a:solidFill>
+            <a:prstDash val="solid"/>
+          </a:ln>
+        </p:spPr>
+      </p:sp>
+      <p:sp>
+        <p:nvSpPr>
+          <p:cNvPr id="15" name="markdot-672"/>
+          <p:cNvSpPr/>
+          <p:nvPr/>
+        </p:nvSpPr>
+        <p:spPr>
+          <a:xfrm>
+            <a:off x="1035460" y="4123748"/>
+            <a:ext cx="292608" cy="292608"/>
+          </a:xfrm>
+          <a:prstGeom prst="ellipse">
             <a:avLst/>
           </a:prstGeom>
           <a:solidFill>
-            <a:srgbClr val="EEF4FF"/>
+            <a:srgbClr val="F59E0B"/>
+          </a:solidFill>
+          <a:ln w="15875">
+            <a:solidFill>
+              <a:srgbClr val="FFFFFF"/>
+            </a:solidFill>
+            <a:prstDash val="solid"/>
+          </a:ln>
+        </p:spPr>
+      </p:sp>
+      <p:sp>
+        <p:nvSpPr>
+          <p:cNvPr id="16" name="t-673"/>
+          <p:cNvSpPr txBox="1"/>
+          <p:nvPr/>
+        </p:nvSpPr>
+        <p:spPr>
+          <a:xfrm>
+            <a:off x="1035460" y="4123748"/>
+            <a:ext cx="292608" cy="292608"/>
+          </a:xfrm>
+          <a:prstGeom prst="rect">
+            <a:avLst/>
+          </a:prstGeom>
+          <a:noFill/>
+          <a:ln/>
+        </p:spPr>
+        <p:txBody>
+          <a:bodyPr wrap="square" lIns="0" tIns="0" rIns="0" bIns="0" rtlCol="0" anchor="ctr"/>
+          <a:lstStyle/>
+          <a:p>
+            <a:pPr algn="ctr" indent="0" marL="0">
+              <a:buNone/>
+            </a:pPr>
+            <a:r>
+              <a:rPr lang="en-US" sz="1100" b="1" dirty="0">
+                <a:solidFill>
+                  <a:srgbClr val="FFFFFF"/>
+                </a:solidFill>
+                <a:latin typeface="Malgun Gothic" pitchFamily="34" charset="0"/>
+                <a:ea typeface="Malgun Gothic" pitchFamily="34" charset="-122"/>
+                <a:cs typeface="Malgun Gothic" pitchFamily="34" charset="-120"/>
+              </a:rPr>
+              <a:t>3</a:t>
+            </a:r>
+            <a:endParaRPr lang="en-US" sz="1100" dirty="0"/>
+          </a:p>
+        </p:txBody>
+      </p:sp>
+      <p:sp>
+        <p:nvSpPr>
+          <p:cNvPr id="17" name="step-674"/>
+          <p:cNvSpPr/>
+          <p:nvPr/>
+        </p:nvSpPr>
+        <p:spPr>
+          <a:xfrm>
+            <a:off x="4206240" y="1783080"/>
+            <a:ext cx="329184" cy="329184"/>
+          </a:xfrm>
+          <a:prstGeom prst="ellipse">
+            <a:avLst/>
+          </a:prstGeom>
+          <a:solidFill>
+            <a:srgbClr val="F59E0B"/>
           </a:solidFill>
           <a:ln w="12700">
             <a:solidFill>
-              <a:srgbClr val="EEF4FF"/>
+              <a:srgbClr val="F59E0B"/>
             </a:solidFill>
             <a:prstDash val="solid"/>
           </a:ln>
@@ -32743,24 +32907,125 @@
       </p:sp>
       <p:sp>
         <p:nvSpPr>
-          <p:cNvPr id="13" name="notebar-672"/>
+          <p:cNvPr id="18" name="t-675"/>
+          <p:cNvSpPr txBox="1"/>
+          <p:nvPr/>
+        </p:nvSpPr>
+        <p:spPr>
+          <a:xfrm>
+            <a:off x="4206240" y="1783080"/>
+            <a:ext cx="329184" cy="329184"/>
+          </a:xfrm>
+          <a:prstGeom prst="rect">
+            <a:avLst/>
+          </a:prstGeom>
+          <a:noFill/>
+          <a:ln/>
+        </p:spPr>
+        <p:txBody>
+          <a:bodyPr wrap="square" lIns="0" tIns="0" rIns="0" bIns="0" rtlCol="0" anchor="ctr"/>
+          <a:lstStyle/>
+          <a:p>
+            <a:pPr algn="ctr" indent="0" marL="0">
+              <a:buNone/>
+            </a:pPr>
+            <a:r>
+              <a:rPr lang="en-US" sz="1200" b="1" dirty="0">
+                <a:solidFill>
+                  <a:srgbClr val="FFFFFF"/>
+                </a:solidFill>
+                <a:latin typeface="Malgun Gothic" pitchFamily="34" charset="0"/>
+                <a:ea typeface="Malgun Gothic" pitchFamily="34" charset="-122"/>
+                <a:cs typeface="Malgun Gothic" pitchFamily="34" charset="-120"/>
+              </a:rPr>
+              <a:t>1</a:t>
+            </a:r>
+            <a:endParaRPr lang="en-US" sz="1200" dirty="0"/>
+          </a:p>
+        </p:txBody>
+      </p:sp>
+      <p:sp>
+        <p:nvSpPr>
+          <p:cNvPr id="19" name="t-676"/>
+          <p:cNvSpPr txBox="1"/>
+          <p:nvPr/>
+        </p:nvSpPr>
+        <p:spPr>
+          <a:xfrm>
+            <a:off x="4681728" y="1737360"/>
+            <a:ext cx="6931152" cy="1234440"/>
+          </a:xfrm>
+          <a:prstGeom prst="rect">
+            <a:avLst/>
+          </a:prstGeom>
+          <a:noFill/>
+          <a:ln/>
+        </p:spPr>
+        <p:txBody>
+          <a:bodyPr wrap="square" lIns="0" tIns="0" rIns="0" bIns="0" rtlCol="0" anchor="t"/>
+          <a:lstStyle/>
+          <a:p>
+            <a:pPr indent="0" marL="0">
+              <a:spcAft>
+                <a:spcPts val="300"/>
+              </a:spcAft>
+              <a:buNone/>
+            </a:pPr>
+            <a:r>
+              <a:rPr lang="en-US" sz="1500" b="1" dirty="0">
+                <a:solidFill>
+                  <a:srgbClr val="0F1B2D"/>
+                </a:solidFill>
+                <a:latin typeface="Malgun Gothic" pitchFamily="34" charset="0"/>
+                <a:ea typeface="Malgun Gothic" pitchFamily="34" charset="-122"/>
+                <a:cs typeface="Malgun Gothic" pitchFamily="34" charset="-120"/>
+              </a:rPr>
+              <a:t>내 정보</a:t>
+            </a:r>
+            <a:endParaRPr lang="en-US" sz="1500" dirty="0"/>
+          </a:p>
+          <a:p>
+            <a:pPr indent="0" marL="0">
+              <a:spcAft>
+                <a:spcPts val="300"/>
+              </a:spcAft>
+              <a:buNone/>
+            </a:pPr>
+            <a:r>
+              <a:rPr lang="en-US" sz="1250" dirty="0">
+                <a:solidFill>
+                  <a:srgbClr val="4B5563"/>
+                </a:solidFill>
+                <a:latin typeface="Malgun Gothic" pitchFamily="34" charset="0"/>
+                <a:ea typeface="Malgun Gothic" pitchFamily="34" charset="-122"/>
+                <a:cs typeface="Malgun Gothic" pitchFamily="34" charset="-120"/>
+              </a:rPr>
+              <a:t>표시 이름 · 회사명 · 이메일을 고칩니다. 로그인 이름과 역할은 바꿀 수 없습니다(역할은 관리자가 정합니다).</a:t>
+            </a:r>
+            <a:endParaRPr lang="en-US" sz="1500" dirty="0"/>
+          </a:p>
+        </p:txBody>
+      </p:sp>
+      <p:sp>
+        <p:nvSpPr>
+          <p:cNvPr id="20" name="step-677"/>
           <p:cNvSpPr/>
           <p:nvPr/>
         </p:nvSpPr>
         <p:spPr>
           <a:xfrm>
-            <a:off x="548640" y="4572000"/>
-            <a:ext cx="64008" cy="731520"/>
-          </a:xfrm>
-          <a:prstGeom prst="rect">
+            <a:off x="4206240" y="3063240"/>
+            <a:ext cx="329184" cy="329184"/>
+          </a:xfrm>
+          <a:prstGeom prst="ellipse">
             <a:avLst/>
           </a:prstGeom>
           <a:solidFill>
-            <a:srgbClr val="2F7CF6"/>
+            <a:srgbClr val="F59E0B"/>
           </a:solidFill>
           <a:ln w="12700">
             <a:solidFill>
-              <a:srgbClr val="2F7CF6"/>
+              <a:srgbClr val="F59E0B"/>
             </a:solidFill>
             <a:prstDash val="solid"/>
           </a:ln>
@@ -32768,14 +33033,14 @@
       </p:sp>
       <p:sp>
         <p:nvSpPr>
-          <p:cNvPr id="14" name="t-673"/>
+          <p:cNvPr id="21" name="t-678"/>
           <p:cNvSpPr txBox="1"/>
           <p:nvPr/>
         </p:nvSpPr>
         <p:spPr>
           <a:xfrm>
-            <a:off x="777240" y="4572000"/>
-            <a:ext cx="4754880" cy="731520"/>
+            <a:off x="4206240" y="3063240"/>
+            <a:ext cx="329184" cy="329184"/>
           </a:xfrm>
           <a:prstGeom prst="rect">
             <a:avLst/>
@@ -32787,35 +33052,209 @@
           <a:bodyPr wrap="square" lIns="0" tIns="0" rIns="0" bIns="0" rtlCol="0" anchor="ctr"/>
           <a:lstStyle/>
           <a:p>
+            <a:pPr algn="ctr" indent="0" marL="0">
+              <a:buNone/>
+            </a:pPr>
+            <a:r>
+              <a:rPr lang="en-US" sz="1200" b="1" dirty="0">
+                <a:solidFill>
+                  <a:srgbClr val="FFFFFF"/>
+                </a:solidFill>
+                <a:latin typeface="Malgun Gothic" pitchFamily="34" charset="0"/>
+                <a:ea typeface="Malgun Gothic" pitchFamily="34" charset="-122"/>
+                <a:cs typeface="Malgun Gothic" pitchFamily="34" charset="-120"/>
+              </a:rPr>
+              <a:t>2</a:t>
+            </a:r>
+            <a:endParaRPr lang="en-US" sz="1200" dirty="0"/>
+          </a:p>
+        </p:txBody>
+      </p:sp>
+      <p:sp>
+        <p:nvSpPr>
+          <p:cNvPr id="22" name="t-679"/>
+          <p:cNvSpPr txBox="1"/>
+          <p:nvPr/>
+        </p:nvSpPr>
+        <p:spPr>
+          <a:xfrm>
+            <a:off x="4681728" y="3017520"/>
+            <a:ext cx="6931152" cy="1234440"/>
+          </a:xfrm>
+          <a:prstGeom prst="rect">
+            <a:avLst/>
+          </a:prstGeom>
+          <a:noFill/>
+          <a:ln/>
+        </p:spPr>
+        <p:txBody>
+          <a:bodyPr wrap="square" lIns="0" tIns="0" rIns="0" bIns="0" rtlCol="0" anchor="t"/>
+          <a:lstStyle/>
+          <a:p>
             <a:pPr indent="0" marL="0">
-              <a:buNone/>
-            </a:pPr>
-            <a:r>
-              <a:rPr lang="en-US" sz="1250" b="1" dirty="0">
-                <a:solidFill>
-                  <a:srgbClr val="2F7CF6"/>
-                </a:solidFill>
-                <a:latin typeface="Malgun Gothic" pitchFamily="34" charset="0"/>
-                <a:ea typeface="Malgun Gothic" pitchFamily="34" charset="-122"/>
-                <a:cs typeface="Malgun Gothic" pitchFamily="34" charset="-120"/>
-              </a:rPr>
-              <a:t>참고  </a:t>
-            </a:r>
+              <a:spcAft>
+                <a:spcPts val="300"/>
+              </a:spcAft>
+              <a:buNone/>
+            </a:pPr>
+            <a:r>
+              <a:rPr lang="en-US" sz="1500" b="1" dirty="0">
+                <a:solidFill>
+                  <a:srgbClr val="0F1B2D"/>
+                </a:solidFill>
+                <a:latin typeface="Malgun Gothic" pitchFamily="34" charset="0"/>
+                <a:ea typeface="Malgun Gothic" pitchFamily="34" charset="-122"/>
+                <a:cs typeface="Malgun Gothic" pitchFamily="34" charset="-120"/>
+              </a:rPr>
+              <a:t>「저장」</a:t>
+            </a:r>
+            <a:endParaRPr lang="en-US" sz="1500" dirty="0"/>
+          </a:p>
+          <a:p>
             <a:pPr indent="0" marL="0">
+              <a:spcAft>
+                <a:spcPts val="300"/>
+              </a:spcAft>
               <a:buNone/>
             </a:pPr>
             <a:r>
               <a:rPr lang="en-US" sz="1250" dirty="0">
                 <a:solidFill>
-                  <a:srgbClr val="1F2937"/>
-                </a:solidFill>
-                <a:latin typeface="Malgun Gothic" pitchFamily="34" charset="0"/>
-                <a:ea typeface="Malgun Gothic" pitchFamily="34" charset="-122"/>
-                <a:cs typeface="Malgun Gothic" pitchFamily="34" charset="-120"/>
-              </a:rPr>
-              <a:t>English로 바꿔도 검사 결과 문구와 검증 결과서는 한국어로 나옵니다.</a:t>
-            </a:r>
-            <a:endParaRPr lang="en-US" sz="1250" dirty="0"/>
+                  <a:srgbClr val="4B5563"/>
+                </a:solidFill>
+                <a:latin typeface="Malgun Gothic" pitchFamily="34" charset="0"/>
+                <a:ea typeface="Malgun Gothic" pitchFamily="34" charset="-122"/>
+                <a:cs typeface="Malgun Gothic" pitchFamily="34" charset="-120"/>
+              </a:rPr>
+              <a:t>바꾼 내용이 있을 때만 눌립니다. 변경 이력에는 새 이름으로 남습니다.</a:t>
+            </a:r>
+            <a:endParaRPr lang="en-US" sz="1500" dirty="0"/>
+          </a:p>
+        </p:txBody>
+      </p:sp>
+      <p:sp>
+        <p:nvSpPr>
+          <p:cNvPr id="23" name="step-680"/>
+          <p:cNvSpPr/>
+          <p:nvPr/>
+        </p:nvSpPr>
+        <p:spPr>
+          <a:xfrm>
+            <a:off x="4206240" y="4343400"/>
+            <a:ext cx="329184" cy="329184"/>
+          </a:xfrm>
+          <a:prstGeom prst="ellipse">
+            <a:avLst/>
+          </a:prstGeom>
+          <a:solidFill>
+            <a:srgbClr val="F59E0B"/>
+          </a:solidFill>
+          <a:ln w="12700">
+            <a:solidFill>
+              <a:srgbClr val="F59E0B"/>
+            </a:solidFill>
+            <a:prstDash val="solid"/>
+          </a:ln>
+        </p:spPr>
+      </p:sp>
+      <p:sp>
+        <p:nvSpPr>
+          <p:cNvPr id="24" name="t-681"/>
+          <p:cNvSpPr txBox="1"/>
+          <p:nvPr/>
+        </p:nvSpPr>
+        <p:spPr>
+          <a:xfrm>
+            <a:off x="4206240" y="4343400"/>
+            <a:ext cx="329184" cy="329184"/>
+          </a:xfrm>
+          <a:prstGeom prst="rect">
+            <a:avLst/>
+          </a:prstGeom>
+          <a:noFill/>
+          <a:ln/>
+        </p:spPr>
+        <p:txBody>
+          <a:bodyPr wrap="square" lIns="0" tIns="0" rIns="0" bIns="0" rtlCol="0" anchor="ctr"/>
+          <a:lstStyle/>
+          <a:p>
+            <a:pPr algn="ctr" indent="0" marL="0">
+              <a:buNone/>
+            </a:pPr>
+            <a:r>
+              <a:rPr lang="en-US" sz="1200" b="1" dirty="0">
+                <a:solidFill>
+                  <a:srgbClr val="FFFFFF"/>
+                </a:solidFill>
+                <a:latin typeface="Malgun Gothic" pitchFamily="34" charset="0"/>
+                <a:ea typeface="Malgun Gothic" pitchFamily="34" charset="-122"/>
+                <a:cs typeface="Malgun Gothic" pitchFamily="34" charset="-120"/>
+              </a:rPr>
+              <a:t>3</a:t>
+            </a:r>
+            <a:endParaRPr lang="en-US" sz="1200" dirty="0"/>
+          </a:p>
+        </p:txBody>
+      </p:sp>
+      <p:sp>
+        <p:nvSpPr>
+          <p:cNvPr id="25" name="t-682"/>
+          <p:cNvSpPr txBox="1"/>
+          <p:nvPr/>
+        </p:nvSpPr>
+        <p:spPr>
+          <a:xfrm>
+            <a:off x="4681728" y="4297680"/>
+            <a:ext cx="6931152" cy="1234440"/>
+          </a:xfrm>
+          <a:prstGeom prst="rect">
+            <a:avLst/>
+          </a:prstGeom>
+          <a:noFill/>
+          <a:ln/>
+        </p:spPr>
+        <p:txBody>
+          <a:bodyPr wrap="square" lIns="0" tIns="0" rIns="0" bIns="0" rtlCol="0" anchor="t"/>
+          <a:lstStyle/>
+          <a:p>
+            <a:pPr indent="0" marL="0">
+              <a:spcAft>
+                <a:spcPts val="300"/>
+              </a:spcAft>
+              <a:buNone/>
+            </a:pPr>
+            <a:r>
+              <a:rPr lang="en-US" sz="1500" b="1" dirty="0">
+                <a:solidFill>
+                  <a:srgbClr val="0F1B2D"/>
+                </a:solidFill>
+                <a:latin typeface="Malgun Gothic" pitchFamily="34" charset="0"/>
+                <a:ea typeface="Malgun Gothic" pitchFamily="34" charset="-122"/>
+                <a:cs typeface="Malgun Gothic" pitchFamily="34" charset="-120"/>
+              </a:rPr>
+              <a:t>비밀번호 바꾸기</a:t>
+            </a:r>
+            <a:endParaRPr lang="en-US" sz="1500" dirty="0"/>
+          </a:p>
+          <a:p>
+            <a:pPr indent="0" marL="0">
+              <a:spcAft>
+                <a:spcPts val="300"/>
+              </a:spcAft>
+              <a:buNone/>
+            </a:pPr>
+            <a:r>
+              <a:rPr lang="en-US" sz="1250" dirty="0">
+                <a:solidFill>
+                  <a:srgbClr val="4B5563"/>
+                </a:solidFill>
+                <a:latin typeface="Malgun Gothic" pitchFamily="34" charset="0"/>
+                <a:ea typeface="Malgun Gothic" pitchFamily="34" charset="-122"/>
+                <a:cs typeface="Malgun Gothic" pitchFamily="34" charset="-120"/>
+              </a:rPr>
+              <a:t>지금 비밀번호와 새 비밀번호(10자 이상)를 넣습니다. 바꾸면 다른 곳의 로그인은 끊깁니다.</a:t>
+            </a:r>
+            <a:endParaRPr lang="en-US" sz="1500" dirty="0"/>
           </a:p>
         </p:txBody>
       </p:sp>
@@ -32894,7 +33333,7 @@
       </p:grpSpPr>
       <p:sp>
         <p:nvSpPr>
-          <p:cNvPr id="2" name="bar-674"/>
+          <p:cNvPr id="2" name="bar-683"/>
           <p:cNvSpPr/>
           <p:nvPr/>
         </p:nvSpPr>
@@ -32919,7 +33358,7 @@
       </p:sp>
       <p:sp>
         <p:nvSpPr>
-          <p:cNvPr id="3" name="t-675"/>
+          <p:cNvPr id="3" name="t-684"/>
           <p:cNvSpPr txBox="1"/>
           <p:nvPr/>
         </p:nvSpPr>
@@ -32988,6 +33427,513 @@
                   <a:srgbClr val="0F1B2D"/>
                 </a:solidFill>
               </a:rPr>
+              <a:t>언어 · 검사 규칙 보기</a:t>
+            </a:r>
+            <a:endParaRPr lang="en-US" sz="2600" dirty="0"/>
+          </a:p>
+        </p:txBody>
+      </p:sp>
+      <p:sp>
+        <p:nvSpPr>
+          <p:cNvPr id="5" name="t-685"/>
+          <p:cNvSpPr txBox="1"/>
+          <p:nvPr/>
+        </p:nvSpPr>
+        <p:spPr>
+          <a:xfrm>
+            <a:off x="548640" y="1152144"/>
+            <a:ext cx="11064240" cy="365760"/>
+          </a:xfrm>
+          <a:prstGeom prst="rect">
+            <a:avLst/>
+          </a:prstGeom>
+          <a:noFill/>
+          <a:ln/>
+        </p:spPr>
+        <p:txBody>
+          <a:bodyPr wrap="square" lIns="0" tIns="0" rIns="0" bIns="0" rtlCol="0" anchor="ctr"/>
+          <a:lstStyle/>
+          <a:p>
+            <a:pPr indent="0" marL="0">
+              <a:buNone/>
+            </a:pPr>
+            <a:r>
+              <a:rPr lang="en-US" sz="1400" dirty="0">
+                <a:solidFill>
+                  <a:srgbClr val="4B5563"/>
+                </a:solidFill>
+                <a:latin typeface="Malgun Gothic" pitchFamily="34" charset="0"/>
+                <a:ea typeface="Malgun Gothic" pitchFamily="34" charset="-122"/>
+                <a:cs typeface="Malgun Gothic" pitchFamily="34" charset="-120"/>
+              </a:rPr>
+              <a:t>설정 ▾ → 언어 / 규칙과 규약 보기</a:t>
+            </a:r>
+            <a:endParaRPr lang="en-US" sz="1400" dirty="0"/>
+          </a:p>
+        </p:txBody>
+      </p:sp>
+      <p:sp>
+        <p:nvSpPr>
+          <p:cNvPr id="6" name="frame-686"/>
+          <p:cNvSpPr/>
+          <p:nvPr/>
+        </p:nvSpPr>
+        <p:spPr>
+          <a:xfrm>
+            <a:off x="548640" y="1666897"/>
+            <a:ext cx="5120640" cy="2244045"/>
+          </a:xfrm>
+          <a:prstGeom prst="rect">
+            <a:avLst/>
+          </a:prstGeom>
+          <a:solidFill>
+            <a:srgbClr val="0F1B2D"/>
+          </a:solidFill>
+          <a:ln w="9525">
+            <a:solidFill>
+              <a:srgbClr val="C9D2DE"/>
+            </a:solidFill>
+            <a:prstDash val="solid"/>
+          </a:ln>
+          <a:effectLst>
+            <a:outerShdw sx="100000" sy="100000" kx="0" ky="0" algn="bl" rotWithShape="0" blurRad="127000" dist="38100" dir="5400000">
+              <a:srgbClr val="0F1B2D">
+                <a:alpha val="18000"/>
+              </a:srgbClr>
+            </a:outerShdw>
+          </a:effectLst>
+        </p:spPr>
+      </p:sp>
+      <p:pic>
+        <p:nvPicPr>
+          <p:cNvPr id="7" name="screen-687" descr="화면: a-lang">    </p:cNvPr>
+          <p:cNvPicPr>
+            <a:picLocks noChangeAspect="1"/>
+          </p:cNvPicPr>
+          <p:nvPr/>
+        </p:nvPicPr>
+        <p:blipFill>
+          <a:blip r:embed="rId1"/>
+          <a:stretch>
+            <a:fillRect/>
+          </a:stretch>
+        </p:blipFill>
+        <p:spPr>
+          <a:xfrm>
+            <a:off x="548640" y="1666897"/>
+            <a:ext cx="5120640" cy="2244045"/>
+          </a:xfrm>
+          <a:prstGeom prst="rect">
+            <a:avLst/>
+          </a:prstGeom>
+        </p:spPr>
+      </p:pic>
+      <p:sp>
+        <p:nvSpPr>
+          <p:cNvPr id="8" name="frame-688"/>
+          <p:cNvSpPr/>
+          <p:nvPr/>
+        </p:nvSpPr>
+        <p:spPr>
+          <a:xfrm>
+            <a:off x="6080760" y="1645920"/>
+            <a:ext cx="5486400" cy="4114800"/>
+          </a:xfrm>
+          <a:prstGeom prst="rect">
+            <a:avLst/>
+          </a:prstGeom>
+          <a:solidFill>
+            <a:srgbClr val="0F1B2D"/>
+          </a:solidFill>
+          <a:ln w="9525">
+            <a:solidFill>
+              <a:srgbClr val="C9D2DE"/>
+            </a:solidFill>
+            <a:prstDash val="solid"/>
+          </a:ln>
+          <a:effectLst>
+            <a:outerShdw sx="100000" sy="100000" kx="0" ky="0" algn="bl" rotWithShape="0" blurRad="127000" dist="38100" dir="5400000">
+              <a:srgbClr val="0F1B2D">
+                <a:alpha val="18000"/>
+              </a:srgbClr>
+            </a:outerShdw>
+          </a:effectLst>
+        </p:spPr>
+      </p:sp>
+      <p:pic>
+        <p:nvPicPr>
+          <p:cNvPr id="9" name="screen-689" descr="화면: a-rules">    </p:cNvPr>
+          <p:cNvPicPr>
+            <a:picLocks noChangeAspect="1"/>
+          </p:cNvPicPr>
+          <p:nvPr/>
+        </p:nvPicPr>
+        <p:blipFill>
+          <a:blip r:embed="rId2"/>
+          <a:stretch>
+            <a:fillRect/>
+          </a:stretch>
+        </p:blipFill>
+        <p:spPr>
+          <a:xfrm>
+            <a:off x="6080760" y="1645920"/>
+            <a:ext cx="5486400" cy="4114800"/>
+          </a:xfrm>
+          <a:prstGeom prst="rect">
+            <a:avLst/>
+          </a:prstGeom>
+        </p:spPr>
+      </p:pic>
+      <p:sp>
+        <p:nvSpPr>
+          <p:cNvPr id="10" name="t-690"/>
+          <p:cNvSpPr txBox="1"/>
+          <p:nvPr/>
+        </p:nvSpPr>
+        <p:spPr>
+          <a:xfrm>
+            <a:off x="548640" y="4041648"/>
+            <a:ext cx="5120640" cy="292608"/>
+          </a:xfrm>
+          <a:prstGeom prst="rect">
+            <a:avLst/>
+          </a:prstGeom>
+          <a:noFill/>
+          <a:ln/>
+        </p:spPr>
+        <p:txBody>
+          <a:bodyPr wrap="square" lIns="0" tIns="0" rIns="0" bIns="0" rtlCol="0" anchor="ctr"/>
+          <a:lstStyle/>
+          <a:p>
+            <a:pPr algn="ctr" indent="0" marL="0">
+              <a:buNone/>
+            </a:pPr>
+            <a:r>
+              <a:rPr lang="en-US" sz="1150" dirty="0">
+                <a:solidFill>
+                  <a:srgbClr val="8A94A6"/>
+                </a:solidFill>
+                <a:latin typeface="Malgun Gothic" pitchFamily="34" charset="0"/>
+                <a:ea typeface="Malgun Gothic" pitchFamily="34" charset="-122"/>
+                <a:cs typeface="Malgun Gothic" pitchFamily="34" charset="-120"/>
+              </a:rPr>
+              <a:t>언어 — 한국어 / English (이 브라우저에만 저장)</a:t>
+            </a:r>
+            <a:endParaRPr lang="en-US" sz="1150" dirty="0"/>
+          </a:p>
+        </p:txBody>
+      </p:sp>
+      <p:sp>
+        <p:nvSpPr>
+          <p:cNvPr id="11" name="t-691"/>
+          <p:cNvSpPr txBox="1"/>
+          <p:nvPr/>
+        </p:nvSpPr>
+        <p:spPr>
+          <a:xfrm>
+            <a:off x="6035040" y="5852160"/>
+            <a:ext cx="5577840" cy="292608"/>
+          </a:xfrm>
+          <a:prstGeom prst="rect">
+            <a:avLst/>
+          </a:prstGeom>
+          <a:noFill/>
+          <a:ln/>
+        </p:spPr>
+        <p:txBody>
+          <a:bodyPr wrap="square" lIns="0" tIns="0" rIns="0" bIns="0" rtlCol="0" anchor="ctr"/>
+          <a:lstStyle/>
+          <a:p>
+            <a:pPr algn="ctr" indent="0" marL="0">
+              <a:buNone/>
+            </a:pPr>
+            <a:r>
+              <a:rPr lang="en-US" sz="1150" dirty="0">
+                <a:solidFill>
+                  <a:srgbClr val="8A94A6"/>
+                </a:solidFill>
+                <a:latin typeface="Malgun Gothic" pitchFamily="34" charset="0"/>
+                <a:ea typeface="Malgun Gothic" pitchFamily="34" charset="-122"/>
+                <a:cs typeface="Malgun Gothic" pitchFamily="34" charset="-120"/>
+              </a:rPr>
+              <a:t>검사 규칙 43종과 작성 규약</a:t>
+            </a:r>
+            <a:endParaRPr lang="en-US" sz="1150" dirty="0"/>
+          </a:p>
+        </p:txBody>
+      </p:sp>
+      <p:sp>
+        <p:nvSpPr>
+          <p:cNvPr id="12" name="note-692"/>
+          <p:cNvSpPr/>
+          <p:nvPr/>
+        </p:nvSpPr>
+        <p:spPr>
+          <a:xfrm>
+            <a:off x="548640" y="4572000"/>
+            <a:ext cx="5120640" cy="731520"/>
+          </a:xfrm>
+          <a:prstGeom prst="rect">
+            <a:avLst/>
+          </a:prstGeom>
+          <a:solidFill>
+            <a:srgbClr val="EEF4FF"/>
+          </a:solidFill>
+          <a:ln w="12700">
+            <a:solidFill>
+              <a:srgbClr val="EEF4FF"/>
+            </a:solidFill>
+            <a:prstDash val="solid"/>
+          </a:ln>
+        </p:spPr>
+      </p:sp>
+      <p:sp>
+        <p:nvSpPr>
+          <p:cNvPr id="13" name="notebar-693"/>
+          <p:cNvSpPr/>
+          <p:nvPr/>
+        </p:nvSpPr>
+        <p:spPr>
+          <a:xfrm>
+            <a:off x="548640" y="4572000"/>
+            <a:ext cx="64008" cy="731520"/>
+          </a:xfrm>
+          <a:prstGeom prst="rect">
+            <a:avLst/>
+          </a:prstGeom>
+          <a:solidFill>
+            <a:srgbClr val="2F7CF6"/>
+          </a:solidFill>
+          <a:ln w="12700">
+            <a:solidFill>
+              <a:srgbClr val="2F7CF6"/>
+            </a:solidFill>
+            <a:prstDash val="solid"/>
+          </a:ln>
+        </p:spPr>
+      </p:sp>
+      <p:sp>
+        <p:nvSpPr>
+          <p:cNvPr id="14" name="t-694"/>
+          <p:cNvSpPr txBox="1"/>
+          <p:nvPr/>
+        </p:nvSpPr>
+        <p:spPr>
+          <a:xfrm>
+            <a:off x="777240" y="4572000"/>
+            <a:ext cx="4754880" cy="731520"/>
+          </a:xfrm>
+          <a:prstGeom prst="rect">
+            <a:avLst/>
+          </a:prstGeom>
+          <a:noFill/>
+          <a:ln/>
+        </p:spPr>
+        <p:txBody>
+          <a:bodyPr wrap="square" lIns="0" tIns="0" rIns="0" bIns="0" rtlCol="0" anchor="ctr"/>
+          <a:lstStyle/>
+          <a:p>
+            <a:pPr indent="0" marL="0">
+              <a:buNone/>
+            </a:pPr>
+            <a:r>
+              <a:rPr lang="en-US" sz="1250" b="1" dirty="0">
+                <a:solidFill>
+                  <a:srgbClr val="2F7CF6"/>
+                </a:solidFill>
+                <a:latin typeface="Malgun Gothic" pitchFamily="34" charset="0"/>
+                <a:ea typeface="Malgun Gothic" pitchFamily="34" charset="-122"/>
+                <a:cs typeface="Malgun Gothic" pitchFamily="34" charset="-120"/>
+              </a:rPr>
+              <a:t>참고  </a:t>
+            </a:r>
+            <a:pPr indent="0" marL="0">
+              <a:buNone/>
+            </a:pPr>
+            <a:r>
+              <a:rPr lang="en-US" sz="1250" dirty="0">
+                <a:solidFill>
+                  <a:srgbClr val="1F2937"/>
+                </a:solidFill>
+                <a:latin typeface="Malgun Gothic" pitchFamily="34" charset="0"/>
+                <a:ea typeface="Malgun Gothic" pitchFamily="34" charset="-122"/>
+                <a:cs typeface="Malgun Gothic" pitchFamily="34" charset="-120"/>
+              </a:rPr>
+              <a:t>English로 바꿔도 검사 결과 문구와 검증 결과서는 한국어로 나옵니다.</a:t>
+            </a:r>
+            <a:endParaRPr lang="en-US" sz="1250" dirty="0"/>
+          </a:p>
+        </p:txBody>
+      </p:sp>
+      <p:sp>
+        <p:nvSpPr>
+          <p:cNvPr id="25" name="Slide Number Placeholder 0"/>
+          <p:cNvSpPr>
+            <a:spLocks noGrp="1"/>
+          </p:cNvSpPr>
+          <p:nvPr>
+            <p:ph type="sldNum" sz="quarter" idx="4294967295"/>
+          </p:nvPr>
+        </p:nvSpPr>
+        <p:spPr>
+          <a:xfrm>
+            <a:off x="11183112" y="6419088"/>
+            <a:ext cx="457200" cy="274320"/>
+          </a:xfrm>
+          <a:prstGeom prst="rect">
+            <a:avLst/>
+          </a:prstGeom>
+          <a:extLst>
+            <a:ext uri="{C572A759-6A51-4108-AA02-DFA0A04FC94B}">
+              <ma14:wrappingTextBoxFlag xmlns:ma14="http://schemas.microsoft.com/office/mac/drawingml/2011/main" val="0"/>
+            </a:ext>
+          </a:extLst>
+        </p:spPr>
+        <p:txBody>
+          <a:bodyPr/>
+          <a:lstStyle>
+            <a:lvl1pPr>
+              <a:defRPr sz="950">
+                <a:solidFill>
+                  <a:srgbClr val="8A94A6"/>
+                </a:solidFill>
+                <a:latin typeface="Malgun Gothic"/>
+                <a:ea typeface="Malgun Gothic"/>
+                <a:cs typeface="Malgun Gothic"/>
+              </a:defRPr>
+            </a:lvl1pPr>
+          </a:lstStyle>
+          <a:p>
+            <a:pPr algn="r"/>
+            <a:fld id="{F7021451-1387-4CA6-816F-3879F97B5CBC}" type="slidenum">
+              <a:rPr b="0" lang="en-US"/>
+              <a:t>38</a:t>
+            </a:fld>
+            <a:endParaRPr lang="en-US"/>
+          </a:p>
+        </p:txBody>
+      </p:sp>
+    </p:spTree>
+  </p:cSld>
+  <p:clrMapOvr>
+    <a:masterClrMapping/>
+  </p:clrMapOvr>
+</p:sld>
+</file>
+
+<file path=ppt/slides/slide39.xml><?xml version="1.0" encoding="utf-8"?>
+<p:sld xmlns:a="http://schemas.openxmlformats.org/drawingml/2006/main" xmlns:r="http://schemas.openxmlformats.org/officeDocument/2006/relationships" xmlns:p="http://schemas.openxmlformats.org/presentationml/2006/main">
+  <p:cSld name="Slide 39">
+    <p:spTree>
+      <p:nvGrpSpPr>
+        <p:cNvPr id="1" name=""/>
+        <p:cNvGrpSpPr/>
+        <p:nvPr/>
+      </p:nvGrpSpPr>
+      <p:grpSpPr>
+        <a:xfrm>
+          <a:off x="0" y="0"/>
+          <a:ext cx="0" cy="0"/>
+          <a:chOff x="0" y="0"/>
+          <a:chExt cx="0" cy="0"/>
+        </a:xfrm>
+      </p:grpSpPr>
+      <p:sp>
+        <p:nvSpPr>
+          <p:cNvPr id="2" name="bar-695"/>
+          <p:cNvSpPr/>
+          <p:nvPr/>
+        </p:nvSpPr>
+        <p:spPr>
+          <a:xfrm>
+            <a:off x="548640" y="329184"/>
+            <a:ext cx="384048" cy="54864"/>
+          </a:xfrm>
+          <a:prstGeom prst="rect">
+            <a:avLst/>
+          </a:prstGeom>
+          <a:solidFill>
+            <a:srgbClr val="2F7CF6"/>
+          </a:solidFill>
+          <a:ln w="12700">
+            <a:solidFill>
+              <a:srgbClr val="2F7CF6"/>
+            </a:solidFill>
+            <a:prstDash val="solid"/>
+          </a:ln>
+        </p:spPr>
+      </p:sp>
+      <p:sp>
+        <p:nvSpPr>
+          <p:cNvPr id="3" name="t-696"/>
+          <p:cNvSpPr txBox="1"/>
+          <p:nvPr/>
+        </p:nvSpPr>
+        <p:spPr>
+          <a:xfrm>
+            <a:off x="1024128" y="228600"/>
+            <a:ext cx="7315200" cy="256032"/>
+          </a:xfrm>
+          <a:prstGeom prst="rect">
+            <a:avLst/>
+          </a:prstGeom>
+          <a:noFill/>
+          <a:ln/>
+        </p:spPr>
+        <p:txBody>
+          <a:bodyPr wrap="square" lIns="0" tIns="0" rIns="0" bIns="0" rtlCol="0" anchor="ctr"/>
+          <a:lstStyle/>
+          <a:p>
+            <a:pPr indent="0" marL="0">
+              <a:buNone/>
+            </a:pPr>
+            <a:r>
+              <a:rPr lang="en-US" sz="1100" b="1" dirty="0">
+                <a:solidFill>
+                  <a:srgbClr val="2F7CF6"/>
+                </a:solidFill>
+                <a:latin typeface="Malgun Gothic" pitchFamily="34" charset="0"/>
+                <a:ea typeface="Malgun Gothic" pitchFamily="34" charset="-122"/>
+                <a:cs typeface="Malgun Gothic" pitchFamily="34" charset="-120"/>
+              </a:rPr>
+              <a:t>내 계정과 설정</a:t>
+            </a:r>
+            <a:endParaRPr lang="en-US" sz="1100" dirty="0"/>
+          </a:p>
+        </p:txBody>
+      </p:sp>
+      <p:sp>
+        <p:nvSpPr>
+          <p:cNvPr id="4" name="Text 0"/>
+          <p:cNvSpPr/>
+          <p:nvPr>
+            <p:ph idx="100" type="title" hasCustomPrompt="1"/>
+          </p:nvPr>
+        </p:nvSpPr>
+        <p:spPr>
+          <a:xfrm>
+            <a:off x="548640" y="566928"/>
+            <a:ext cx="11064240" cy="566928"/>
+          </a:xfrm>
+          <a:prstGeom prst="rect">
+            <a:avLst/>
+          </a:prstGeom>
+          <a:noFill/>
+          <a:ln/>
+        </p:spPr>
+        <p:txBody>
+          <a:bodyPr wrap="square" lIns="0" tIns="0" rIns="0" bIns="0" rtlCol="0" anchor="ctr"/>
+          <a:lstStyle/>
+          <a:p>
+            <a:pPr algn="l" indent="0" marL="0">
+              <a:buNone/>
+            </a:pPr>
+            <a:r>
+              <a:rPr lang="en-US" sz="2600" b="1" dirty="0">
+                <a:solidFill>
+                  <a:srgbClr val="0F1B2D"/>
+                </a:solidFill>
+              </a:rPr>
               <a:t>자주 묻는 질문</a:t>
             </a:r>
             <a:endParaRPr lang="en-US" sz="2600" dirty="0"/>
@@ -32996,7 +33942,7 @@
       </p:sp>
       <p:graphicFrame>
         <p:nvGraphicFramePr>
-          <p:cNvPr id="39" name="table-676"/>
+          <p:cNvPr id="40" name="table-697"/>
           <p:cNvGraphicFramePr>
             <a:graphicFrameLocks noGrp="1"/>
           </p:cNvGraphicFramePr>
@@ -33244,7 +34190,7 @@
                           <a:ea typeface="Malgun Gothic" pitchFamily="34" charset="-122"/>
                           <a:cs typeface="Malgun Gothic" pitchFamily="34" charset="-120"/>
                         </a:rPr>
-                        <a:t>체험 계정이라서입니다. 회원가입하면 내려받을 수 있습니다.</a:t>
+                        <a:t>데모 계정이라서입니다. 회원가입하면 내려받을 수 있습니다.</a:t>
                       </a:r>
                       <a:endParaRPr lang="en-US" sz="1400" dirty="0">
                         <a:latin typeface="Malgun Gothic" charset="0"/>
@@ -33452,7 +34398,7 @@
                           <a:ea typeface="Malgun Gothic" pitchFamily="34" charset="-122"/>
                           <a:cs typeface="Malgun Gothic" pitchFamily="34" charset="-120"/>
                         </a:rPr>
-                        <a:t>체험 계정으로 만든 파일이 사라졌어요</a:t>
+                        <a:t>데모 계정으로 만든 파일이 사라졌어요</a:t>
                       </a:r>
                       <a:endParaRPr lang="en-US" sz="1400" dirty="0">
                         <a:latin typeface="Malgun Gothic" charset="0"/>
@@ -34170,278 +35116,9 @@
             <a:pPr algn="r"/>
             <a:fld id="{F7021451-1387-4CA6-816F-3879F97B5CBC}" type="slidenum">
               <a:rPr b="0" lang="en-US"/>
-              <a:t>38</a:t>
+              <a:t>39</a:t>
             </a:fld>
             <a:endParaRPr lang="en-US"/>
-          </a:p>
-        </p:txBody>
-      </p:sp>
-    </p:spTree>
-  </p:cSld>
-  <p:clrMapOvr>
-    <a:masterClrMapping/>
-  </p:clrMapOvr>
-</p:sld>
-</file>
-
-<file path=ppt/slides/slide39.xml><?xml version="1.0" encoding="utf-8"?>
-<p:sld xmlns:a="http://schemas.openxmlformats.org/drawingml/2006/main" xmlns:r="http://schemas.openxmlformats.org/officeDocument/2006/relationships" xmlns:p="http://schemas.openxmlformats.org/presentationml/2006/main">
-  <p:cSld name="Slide 39">
-    <p:spTree>
-      <p:nvGrpSpPr>
-        <p:cNvPr id="1" name=""/>
-        <p:cNvGrpSpPr/>
-        <p:nvPr/>
-      </p:nvGrpSpPr>
-      <p:grpSpPr>
-        <a:xfrm>
-          <a:off x="0" y="0"/>
-          <a:ext cx="0" cy="0"/>
-          <a:chOff x="0" y="0"/>
-          <a:chExt cx="0" cy="0"/>
-        </a:xfrm>
-      </p:grpSpPr>
-      <p:sp>
-        <p:nvSpPr>
-          <p:cNvPr id="2" name="Shape 0"/>
-          <p:cNvSpPr/>
-          <p:nvPr/>
-        </p:nvSpPr>
-        <p:spPr>
-          <a:xfrm>
-            <a:off x="0" y="0"/>
-            <a:ext cx="164592" cy="6858000"/>
-          </a:xfrm>
-          <a:prstGeom prst="rect">
-            <a:avLst/>
-          </a:prstGeom>
-          <a:solidFill>
-            <a:srgbClr val="2F7CF6"/>
-          </a:solidFill>
-          <a:ln w="12700">
-            <a:solidFill>
-              <a:srgbClr val="2F7CF6"/>
-            </a:solidFill>
-            <a:prstDash val="solid"/>
-          </a:ln>
-        </p:spPr>
-      </p:sp>
-      <p:sp>
-        <p:nvSpPr>
-          <p:cNvPr id="3" name="t-677"/>
-          <p:cNvSpPr txBox="1"/>
-          <p:nvPr/>
-        </p:nvSpPr>
-        <p:spPr>
-          <a:xfrm>
-            <a:off x="731520" y="1234440"/>
-            <a:ext cx="5486400" cy="548640"/>
-          </a:xfrm>
-          <a:prstGeom prst="rect">
-            <a:avLst/>
-          </a:prstGeom>
-          <a:noFill/>
-          <a:ln/>
-        </p:spPr>
-        <p:txBody>
-          <a:bodyPr wrap="square" lIns="0" tIns="0" rIns="0" bIns="0" rtlCol="0" anchor="ctr"/>
-          <a:lstStyle/>
-          <a:p>
-            <a:pPr indent="0" marL="0">
-              <a:buNone/>
-            </a:pPr>
-            <a:r>
-              <a:rPr lang="en-US" sz="2600" b="1" spc="600" kern="0" dirty="0">
-                <a:solidFill>
-                  <a:srgbClr val="2F7CF6"/>
-                </a:solidFill>
-                <a:latin typeface="Malgun Gothic" pitchFamily="34" charset="0"/>
-                <a:ea typeface="Malgun Gothic" pitchFamily="34" charset="-122"/>
-                <a:cs typeface="Malgun Gothic" pitchFamily="34" charset="-120"/>
-              </a:rPr>
-              <a:t>VEXPLOR</a:t>
-            </a:r>
-            <a:endParaRPr lang="en-US" sz="2600" dirty="0"/>
-          </a:p>
-        </p:txBody>
-      </p:sp>
-      <p:sp>
-        <p:nvSpPr>
-          <p:cNvPr id="4" name="t-678"/>
-          <p:cNvSpPr txBox="1"/>
-          <p:nvPr/>
-        </p:nvSpPr>
-        <p:spPr>
-          <a:xfrm>
-            <a:off x="731520" y="1828800"/>
-            <a:ext cx="10698480" cy="1371600"/>
-          </a:xfrm>
-          <a:prstGeom prst="rect">
-            <a:avLst/>
-          </a:prstGeom>
-          <a:noFill/>
-          <a:ln/>
-        </p:spPr>
-        <p:txBody>
-          <a:bodyPr wrap="square" lIns="0" tIns="0" rIns="0" bIns="0" rtlCol="0" anchor="b"/>
-          <a:lstStyle/>
-          <a:p>
-            <a:pPr indent="0" marL="0">
-              <a:buNone/>
-            </a:pPr>
-            <a:r>
-              <a:rPr lang="en-US" sz="4400" b="1" dirty="0">
-                <a:solidFill>
-                  <a:srgbClr val="FFFFFF"/>
-                </a:solidFill>
-                <a:latin typeface="Malgun Gothic" pitchFamily="34" charset="0"/>
-                <a:ea typeface="Malgun Gothic" pitchFamily="34" charset="-122"/>
-                <a:cs typeface="Malgun Gothic" pitchFamily="34" charset="-120"/>
-              </a:rPr>
-              <a:t>처음이라면, 이렇게</a:t>
-            </a:r>
-            <a:endParaRPr lang="en-US" sz="4400" dirty="0"/>
-          </a:p>
-        </p:txBody>
-      </p:sp>
-      <p:sp>
-        <p:nvSpPr>
-          <p:cNvPr id="5" name="t-679"/>
-          <p:cNvSpPr txBox="1"/>
-          <p:nvPr/>
-        </p:nvSpPr>
-        <p:spPr>
-          <a:xfrm>
-            <a:off x="731520" y="3383280"/>
-            <a:ext cx="10698480" cy="1463040"/>
-          </a:xfrm>
-          <a:prstGeom prst="rect">
-            <a:avLst/>
-          </a:prstGeom>
-          <a:noFill/>
-          <a:ln/>
-        </p:spPr>
-        <p:txBody>
-          <a:bodyPr wrap="square" lIns="0" tIns="0" rIns="0" bIns="0" rtlCol="0" anchor="t"/>
-          <a:lstStyle/>
-          <a:p>
-            <a:pPr indent="0" marL="0">
-              <a:spcAft>
-                <a:spcPts val="600"/>
-              </a:spcAft>
-              <a:buNone/>
-            </a:pPr>
-            <a:r>
-              <a:rPr lang="en-US" sz="1700" dirty="0">
-                <a:solidFill>
-                  <a:srgbClr val="9CC2FF"/>
-                </a:solidFill>
-                <a:latin typeface="Malgun Gothic" pitchFamily="34" charset="0"/>
-                <a:ea typeface="Malgun Gothic" pitchFamily="34" charset="-122"/>
-                <a:cs typeface="Malgun Gothic" pitchFamily="34" charset="-120"/>
-              </a:rPr>
-              <a:t>① 체험 계정으로 둘러보기</a:t>
-            </a:r>
-            <a:endParaRPr lang="en-US" sz="1700" dirty="0"/>
-          </a:p>
-          <a:p>
-            <a:pPr indent="0" marL="0">
-              <a:spcAft>
-                <a:spcPts val="600"/>
-              </a:spcAft>
-              <a:buNone/>
-            </a:pPr>
-            <a:r>
-              <a:rPr lang="en-US" sz="1700" dirty="0">
-                <a:solidFill>
-                  <a:srgbClr val="9CC2FF"/>
-                </a:solidFill>
-                <a:latin typeface="Malgun Gothic" pitchFamily="34" charset="0"/>
-                <a:ea typeface="Malgun Gothic" pitchFamily="34" charset="-122"/>
-                <a:cs typeface="Malgun Gothic" pitchFamily="34" charset="-120"/>
-              </a:rPr>
-              <a:t>② 회원가입 → 견본 열기</a:t>
-            </a:r>
-            <a:endParaRPr lang="en-US" sz="1700" dirty="0"/>
-          </a:p>
-          <a:p>
-            <a:pPr indent="0" marL="0">
-              <a:spcAft>
-                <a:spcPts val="600"/>
-              </a:spcAft>
-              <a:buNone/>
-            </a:pPr>
-            <a:r>
-              <a:rPr lang="en-US" sz="1700" dirty="0">
-                <a:solidFill>
-                  <a:srgbClr val="9CC2FF"/>
-                </a:solidFill>
-                <a:latin typeface="Malgun Gothic" pitchFamily="34" charset="0"/>
-                <a:ea typeface="Malgun Gothic" pitchFamily="34" charset="-122"/>
-                <a:cs typeface="Malgun Gothic" pitchFamily="34" charset="-120"/>
-              </a:rPr>
-              <a:t>③ 「다른 파일에서 가져오기」로 내 설비 만들기</a:t>
-            </a:r>
-            <a:endParaRPr lang="en-US" sz="1700" dirty="0"/>
-          </a:p>
-          <a:p>
-            <a:pPr indent="0" marL="0">
-              <a:spcAft>
-                <a:spcPts val="600"/>
-              </a:spcAft>
-              <a:buNone/>
-            </a:pPr>
-            <a:r>
-              <a:rPr lang="en-US" sz="1700" dirty="0">
-                <a:solidFill>
-                  <a:srgbClr val="9CC2FF"/>
-                </a:solidFill>
-                <a:latin typeface="Malgun Gothic" pitchFamily="34" charset="0"/>
-                <a:ea typeface="Malgun Gothic" pitchFamily="34" charset="-122"/>
-                <a:cs typeface="Malgun Gothic" pitchFamily="34" charset="-120"/>
-              </a:rPr>
-              <a:t>④ 검사 · 자동 고치기 → AASX 내려받기</a:t>
-            </a:r>
-            <a:endParaRPr lang="en-US" sz="1700" dirty="0"/>
-          </a:p>
-        </p:txBody>
-      </p:sp>
-      <p:sp>
-        <p:nvSpPr>
-          <p:cNvPr id="6" name="t-680"/>
-          <p:cNvSpPr txBox="1"/>
-          <p:nvPr/>
-        </p:nvSpPr>
-        <p:spPr>
-          <a:xfrm>
-            <a:off x="731520" y="5989320"/>
-            <a:ext cx="7315200" cy="365760"/>
-          </a:xfrm>
-          <a:prstGeom prst="rect">
-            <a:avLst/>
-          </a:prstGeom>
-          <a:noFill/>
-          <a:ln/>
-        </p:spPr>
-        <p:txBody>
-          <a:bodyPr wrap="square" lIns="0" tIns="0" rIns="0" bIns="0" rtlCol="0" anchor="ctr"/>
-          <a:lstStyle/>
-          <a:p>
-            <a:pPr indent="0" marL="0">
-              <a:buNone/>
-            </a:pPr>
-            <a:r>
-              <a:rPr lang="en-US" sz="1200" dirty="0">
-                <a:solidFill>
-                  <a:srgbClr val="8FA3BF"/>
-                </a:solidFill>
-                <a:latin typeface="Malgun Gothic" pitchFamily="34" charset="0"/>
-                <a:ea typeface="Malgun Gothic" pitchFamily="34" charset="-122"/>
-                <a:cs typeface="Malgun Gothic" pitchFamily="34" charset="-120"/>
-              </a:rPr>
-              <a:t>© 2026 WACE  ·  VEXPLOR AAS Studio</a:t>
-            </a:r>
-            <a:endParaRPr lang="en-US" sz="1200" dirty="0"/>
           </a:p>
         </p:txBody>
       </p:sp>
@@ -34725,7 +35402,7 @@
                 <a:ea typeface="Malgun Gothic" pitchFamily="34" charset="-122"/>
                 <a:cs typeface="Malgun Gothic" pitchFamily="34" charset="-120"/>
               </a:rPr>
-              <a:t>체험 계정 또는</a:t>
+              <a:t>데모 계정 또는</a:t>
             </a:r>
             <a:endParaRPr lang="en-US" sz="1150" dirty="0"/>
           </a:p>
@@ -35547,6 +36224,275 @@
               <a:t>4</a:t>
             </a:fld>
             <a:endParaRPr lang="en-US"/>
+          </a:p>
+        </p:txBody>
+      </p:sp>
+    </p:spTree>
+  </p:cSld>
+  <p:clrMapOvr>
+    <a:masterClrMapping/>
+  </p:clrMapOvr>
+</p:sld>
+</file>
+
+<file path=ppt/slides/slide40.xml><?xml version="1.0" encoding="utf-8"?>
+<p:sld xmlns:a="http://schemas.openxmlformats.org/drawingml/2006/main" xmlns:r="http://schemas.openxmlformats.org/officeDocument/2006/relationships" xmlns:p="http://schemas.openxmlformats.org/presentationml/2006/main">
+  <p:cSld name="Slide 40">
+    <p:spTree>
+      <p:nvGrpSpPr>
+        <p:cNvPr id="1" name=""/>
+        <p:cNvGrpSpPr/>
+        <p:nvPr/>
+      </p:nvGrpSpPr>
+      <p:grpSpPr>
+        <a:xfrm>
+          <a:off x="0" y="0"/>
+          <a:ext cx="0" cy="0"/>
+          <a:chOff x="0" y="0"/>
+          <a:chExt cx="0" cy="0"/>
+        </a:xfrm>
+      </p:grpSpPr>
+      <p:sp>
+        <p:nvSpPr>
+          <p:cNvPr id="2" name="Shape 0"/>
+          <p:cNvSpPr/>
+          <p:nvPr/>
+        </p:nvSpPr>
+        <p:spPr>
+          <a:xfrm>
+            <a:off x="0" y="0"/>
+            <a:ext cx="164592" cy="6858000"/>
+          </a:xfrm>
+          <a:prstGeom prst="rect">
+            <a:avLst/>
+          </a:prstGeom>
+          <a:solidFill>
+            <a:srgbClr val="2F7CF6"/>
+          </a:solidFill>
+          <a:ln w="12700">
+            <a:solidFill>
+              <a:srgbClr val="2F7CF6"/>
+            </a:solidFill>
+            <a:prstDash val="solid"/>
+          </a:ln>
+        </p:spPr>
+      </p:sp>
+      <p:sp>
+        <p:nvSpPr>
+          <p:cNvPr id="3" name="t-698"/>
+          <p:cNvSpPr txBox="1"/>
+          <p:nvPr/>
+        </p:nvSpPr>
+        <p:spPr>
+          <a:xfrm>
+            <a:off x="731520" y="1234440"/>
+            <a:ext cx="5486400" cy="548640"/>
+          </a:xfrm>
+          <a:prstGeom prst="rect">
+            <a:avLst/>
+          </a:prstGeom>
+          <a:noFill/>
+          <a:ln/>
+        </p:spPr>
+        <p:txBody>
+          <a:bodyPr wrap="square" lIns="0" tIns="0" rIns="0" bIns="0" rtlCol="0" anchor="ctr"/>
+          <a:lstStyle/>
+          <a:p>
+            <a:pPr indent="0" marL="0">
+              <a:buNone/>
+            </a:pPr>
+            <a:r>
+              <a:rPr lang="en-US" sz="2600" b="1" spc="600" kern="0" dirty="0">
+                <a:solidFill>
+                  <a:srgbClr val="2F7CF6"/>
+                </a:solidFill>
+                <a:latin typeface="Malgun Gothic" pitchFamily="34" charset="0"/>
+                <a:ea typeface="Malgun Gothic" pitchFamily="34" charset="-122"/>
+                <a:cs typeface="Malgun Gothic" pitchFamily="34" charset="-120"/>
+              </a:rPr>
+              <a:t>VEXPLOR</a:t>
+            </a:r>
+            <a:endParaRPr lang="en-US" sz="2600" dirty="0"/>
+          </a:p>
+        </p:txBody>
+      </p:sp>
+      <p:sp>
+        <p:nvSpPr>
+          <p:cNvPr id="4" name="t-699"/>
+          <p:cNvSpPr txBox="1"/>
+          <p:nvPr/>
+        </p:nvSpPr>
+        <p:spPr>
+          <a:xfrm>
+            <a:off x="731520" y="1828800"/>
+            <a:ext cx="10698480" cy="1371600"/>
+          </a:xfrm>
+          <a:prstGeom prst="rect">
+            <a:avLst/>
+          </a:prstGeom>
+          <a:noFill/>
+          <a:ln/>
+        </p:spPr>
+        <p:txBody>
+          <a:bodyPr wrap="square" lIns="0" tIns="0" rIns="0" bIns="0" rtlCol="0" anchor="b"/>
+          <a:lstStyle/>
+          <a:p>
+            <a:pPr indent="0" marL="0">
+              <a:buNone/>
+            </a:pPr>
+            <a:r>
+              <a:rPr lang="en-US" sz="4400" b="1" dirty="0">
+                <a:solidFill>
+                  <a:srgbClr val="FFFFFF"/>
+                </a:solidFill>
+                <a:latin typeface="Malgun Gothic" pitchFamily="34" charset="0"/>
+                <a:ea typeface="Malgun Gothic" pitchFamily="34" charset="-122"/>
+                <a:cs typeface="Malgun Gothic" pitchFamily="34" charset="-120"/>
+              </a:rPr>
+              <a:t>처음이라면, 이렇게</a:t>
+            </a:r>
+            <a:endParaRPr lang="en-US" sz="4400" dirty="0"/>
+          </a:p>
+        </p:txBody>
+      </p:sp>
+      <p:sp>
+        <p:nvSpPr>
+          <p:cNvPr id="5" name="t-700"/>
+          <p:cNvSpPr txBox="1"/>
+          <p:nvPr/>
+        </p:nvSpPr>
+        <p:spPr>
+          <a:xfrm>
+            <a:off x="731520" y="3383280"/>
+            <a:ext cx="10698480" cy="1463040"/>
+          </a:xfrm>
+          <a:prstGeom prst="rect">
+            <a:avLst/>
+          </a:prstGeom>
+          <a:noFill/>
+          <a:ln/>
+        </p:spPr>
+        <p:txBody>
+          <a:bodyPr wrap="square" lIns="0" tIns="0" rIns="0" bIns="0" rtlCol="0" anchor="t"/>
+          <a:lstStyle/>
+          <a:p>
+            <a:pPr indent="0" marL="0">
+              <a:spcAft>
+                <a:spcPts val="600"/>
+              </a:spcAft>
+              <a:buNone/>
+            </a:pPr>
+            <a:r>
+              <a:rPr lang="en-US" sz="1700" dirty="0">
+                <a:solidFill>
+                  <a:srgbClr val="9CC2FF"/>
+                </a:solidFill>
+                <a:latin typeface="Malgun Gothic" pitchFamily="34" charset="0"/>
+                <a:ea typeface="Malgun Gothic" pitchFamily="34" charset="-122"/>
+                <a:cs typeface="Malgun Gothic" pitchFamily="34" charset="-120"/>
+              </a:rPr>
+              <a:t>① 데모 계정으로 둘러보기</a:t>
+            </a:r>
+            <a:endParaRPr lang="en-US" sz="1700" dirty="0"/>
+          </a:p>
+          <a:p>
+            <a:pPr indent="0" marL="0">
+              <a:spcAft>
+                <a:spcPts val="600"/>
+              </a:spcAft>
+              <a:buNone/>
+            </a:pPr>
+            <a:r>
+              <a:rPr lang="en-US" sz="1700" dirty="0">
+                <a:solidFill>
+                  <a:srgbClr val="9CC2FF"/>
+                </a:solidFill>
+                <a:latin typeface="Malgun Gothic" pitchFamily="34" charset="0"/>
+                <a:ea typeface="Malgun Gothic" pitchFamily="34" charset="-122"/>
+                <a:cs typeface="Malgun Gothic" pitchFamily="34" charset="-120"/>
+              </a:rPr>
+              <a:t>② 회원가입 → 견본 열기</a:t>
+            </a:r>
+            <a:endParaRPr lang="en-US" sz="1700" dirty="0"/>
+          </a:p>
+          <a:p>
+            <a:pPr indent="0" marL="0">
+              <a:spcAft>
+                <a:spcPts val="600"/>
+              </a:spcAft>
+              <a:buNone/>
+            </a:pPr>
+            <a:r>
+              <a:rPr lang="en-US" sz="1700" dirty="0">
+                <a:solidFill>
+                  <a:srgbClr val="9CC2FF"/>
+                </a:solidFill>
+                <a:latin typeface="Malgun Gothic" pitchFamily="34" charset="0"/>
+                <a:ea typeface="Malgun Gothic" pitchFamily="34" charset="-122"/>
+                <a:cs typeface="Malgun Gothic" pitchFamily="34" charset="-120"/>
+              </a:rPr>
+              <a:t>③ 「다른 파일에서 가져오기」로 내 설비 만들기</a:t>
+            </a:r>
+            <a:endParaRPr lang="en-US" sz="1700" dirty="0"/>
+          </a:p>
+          <a:p>
+            <a:pPr indent="0" marL="0">
+              <a:spcAft>
+                <a:spcPts val="600"/>
+              </a:spcAft>
+              <a:buNone/>
+            </a:pPr>
+            <a:r>
+              <a:rPr lang="en-US" sz="1700" dirty="0">
+                <a:solidFill>
+                  <a:srgbClr val="9CC2FF"/>
+                </a:solidFill>
+                <a:latin typeface="Malgun Gothic" pitchFamily="34" charset="0"/>
+                <a:ea typeface="Malgun Gothic" pitchFamily="34" charset="-122"/>
+                <a:cs typeface="Malgun Gothic" pitchFamily="34" charset="-120"/>
+              </a:rPr>
+              <a:t>④ 검사 · 자동 고치기 → AASX 내려받기</a:t>
+            </a:r>
+            <a:endParaRPr lang="en-US" sz="1700" dirty="0"/>
+          </a:p>
+        </p:txBody>
+      </p:sp>
+      <p:sp>
+        <p:nvSpPr>
+          <p:cNvPr id="6" name="t-701"/>
+          <p:cNvSpPr txBox="1"/>
+          <p:nvPr/>
+        </p:nvSpPr>
+        <p:spPr>
+          <a:xfrm>
+            <a:off x="731520" y="5989320"/>
+            <a:ext cx="7315200" cy="365760"/>
+          </a:xfrm>
+          <a:prstGeom prst="rect">
+            <a:avLst/>
+          </a:prstGeom>
+          <a:noFill/>
+          <a:ln/>
+        </p:spPr>
+        <p:txBody>
+          <a:bodyPr wrap="square" lIns="0" tIns="0" rIns="0" bIns="0" rtlCol="0" anchor="ctr"/>
+          <a:lstStyle/>
+          <a:p>
+            <a:pPr indent="0" marL="0">
+              <a:buNone/>
+            </a:pPr>
+            <a:r>
+              <a:rPr lang="en-US" sz="1200" dirty="0">
+                <a:solidFill>
+                  <a:srgbClr val="8FA3BF"/>
+                </a:solidFill>
+                <a:latin typeface="Malgun Gothic" pitchFamily="34" charset="0"/>
+                <a:ea typeface="Malgun Gothic" pitchFamily="34" charset="-122"/>
+                <a:cs typeface="Malgun Gothic" pitchFamily="34" charset="-120"/>
+              </a:rPr>
+              <a:t>© 2026 WACE  ·  VEXPLOR AAS Studio</a:t>
+            </a:r>
+            <a:endParaRPr lang="en-US" sz="1200" dirty="0"/>
           </a:p>
         </p:txBody>
       </p:sp>
@@ -35685,7 +36631,7 @@
                 <a:ea typeface="Malgun Gothic" pitchFamily="34" charset="-122"/>
                 <a:cs typeface="Malgun Gothic" pitchFamily="34" charset="-120"/>
               </a:rPr>
-              <a:t>로그인 · 회원가입 · 체험 계정</a:t>
+              <a:t>로그인 · 회원가입 · 데모 계정</a:t>
             </a:r>
             <a:endParaRPr lang="en-US" sz="1700" dirty="0"/>
           </a:p>
@@ -35772,7 +36718,7 @@
                 <a:ea typeface="Malgun Gothic" pitchFamily="34" charset="-122"/>
                 <a:cs typeface="Malgun Gothic" pitchFamily="34" charset="-120"/>
               </a:rPr>
-              <a:t>가입 없이 체험 계정으로 먼저 둘러볼 수 있습니다</a:t>
+              <a:t>가입 없이 데모 계정으로 먼저 둘러볼 수 있습니다</a:t>
             </a:r>
             <a:endParaRPr lang="en-US" sz="1400" dirty="0"/>
           </a:p>
@@ -35793,7 +36739,7 @@
                 <a:ea typeface="Malgun Gothic" pitchFamily="34" charset="-122"/>
                 <a:cs typeface="Malgun Gothic" pitchFamily="34" charset="-120"/>
               </a:rPr>
-              <a:t>체험 계정은 파일 내려받기와 견본 열기가 막혀 있습니다</a:t>
+              <a:t>데모 계정은 파일 내려받기와 견본 열기가 막혀 있습니다</a:t>
             </a:r>
             <a:endParaRPr lang="en-US" sz="1400" dirty="0"/>
           </a:p>
@@ -36685,7 +37631,7 @@
                 <a:ea typeface="Malgun Gothic" pitchFamily="34" charset="-122"/>
                 <a:cs typeface="Malgun Gothic" pitchFamily="34" charset="-120"/>
               </a:rPr>
-              <a:t>체험 계정으로 들어가기</a:t>
+              <a:t>데모 계정으로 들어가기</a:t>
             </a:r>
             <a:endParaRPr lang="en-US" sz="1600" dirty="0"/>
           </a:p>
@@ -36705,7 +37651,7 @@
                 <a:ea typeface="Malgun Gothic" pitchFamily="34" charset="-122"/>
                 <a:cs typeface="Malgun Gothic" pitchFamily="34" charset="-120"/>
               </a:rPr>
-              <a:t>가입 없이 바로 둘러볼 수 있는 공용 계정입니다(admin / 1234).</a:t>
+              <a:t>가입 없이 바로 둘러볼 수 있는 공용 계정입니다(demo / 0629).</a:t>
             </a:r>
             <a:endParaRPr lang="en-US" sz="1600" dirty="0"/>
           </a:p>
@@ -37036,8 +37982,8 @@
         </p:nvSpPr>
         <p:spPr>
           <a:xfrm>
-            <a:off x="1336853" y="1600200"/>
-            <a:ext cx="1989734" cy="4663440"/>
+            <a:off x="1360892" y="1600200"/>
+            <a:ext cx="1941655" cy="4663440"/>
           </a:xfrm>
           <a:prstGeom prst="rect">
             <a:avLst/>
@@ -37076,8 +38022,8 @@
         </p:blipFill>
         <p:spPr>
           <a:xfrm>
-            <a:off x="1336853" y="1600200"/>
-            <a:ext cx="1989734" cy="4663440"/>
+            <a:off x="1360892" y="1600200"/>
+            <a:ext cx="1941655" cy="4663440"/>
           </a:xfrm>
           <a:prstGeom prst="rect">
             <a:avLst/>
@@ -37092,12 +38038,12 @@
         </p:nvSpPr>
         <p:spPr>
           <a:xfrm>
-            <a:off x="1504711" y="2403174"/>
-            <a:ext cx="1654019" cy="241663"/>
+            <a:off x="1523921" y="2495683"/>
+            <a:ext cx="1615599" cy="237370"/>
           </a:xfrm>
           <a:prstGeom prst="roundRect">
             <a:avLst>
-              <a:gd name="adj" fmla="val 15135"/>
+              <a:gd name="adj" fmla="val 15409"/>
             </a:avLst>
           </a:prstGeom>
           <a:ln w="28575">
@@ -37116,7 +38062,7 @@
         </p:nvSpPr>
         <p:spPr>
           <a:xfrm>
-            <a:off x="1358407" y="2256870"/>
+            <a:off x="1377617" y="2349379"/>
             <a:ext cx="292608" cy="292608"/>
           </a:xfrm>
           <a:prstGeom prst="ellipse">
@@ -37141,7 +38087,7 @@
         </p:nvSpPr>
         <p:spPr>
           <a:xfrm>
-            <a:off x="1358407" y="2256870"/>
+            <a:off x="1377617" y="2349379"/>
             <a:ext cx="292608" cy="292608"/>
           </a:xfrm>
           <a:prstGeom prst="rect">
@@ -37180,12 +38126,12 @@
         </p:nvSpPr>
         <p:spPr>
           <a:xfrm>
-            <a:off x="1504711" y="3837737"/>
-            <a:ext cx="1654019" cy="241663"/>
+            <a:off x="1523921" y="3899916"/>
+            <a:ext cx="1615599" cy="237370"/>
           </a:xfrm>
           <a:prstGeom prst="roundRect">
             <a:avLst>
-              <a:gd name="adj" fmla="val 15135"/>
+              <a:gd name="adj" fmla="val 15409"/>
             </a:avLst>
           </a:prstGeom>
           <a:ln w="28575">
@@ -37204,7 +38150,7 @@
         </p:nvSpPr>
         <p:spPr>
           <a:xfrm>
-            <a:off x="1358407" y="3691433"/>
+            <a:off x="1377617" y="3753612"/>
             <a:ext cx="292608" cy="292608"/>
           </a:xfrm>
           <a:prstGeom prst="ellipse">
@@ -37229,7 +38175,7 @@
         </p:nvSpPr>
         <p:spPr>
           <a:xfrm>
-            <a:off x="1358407" y="3691433"/>
+            <a:off x="1377617" y="3753612"/>
             <a:ext cx="292608" cy="292608"/>
           </a:xfrm>
           <a:prstGeom prst="rect">
@@ -37268,12 +38214,12 @@
         </p:nvSpPr>
         <p:spPr>
           <a:xfrm>
-            <a:off x="1504711" y="4552798"/>
-            <a:ext cx="1654019" cy="1089965"/>
+            <a:off x="1523921" y="4597698"/>
+            <a:ext cx="1615599" cy="1065174"/>
           </a:xfrm>
           <a:prstGeom prst="roundRect">
             <a:avLst>
-              <a:gd name="adj" fmla="val 3356"/>
+              <a:gd name="adj" fmla="val 3434"/>
             </a:avLst>
           </a:prstGeom>
           <a:ln w="28575">
@@ -37292,7 +38238,7 @@
         </p:nvSpPr>
         <p:spPr>
           <a:xfrm>
-            <a:off x="1358407" y="4406494"/>
+            <a:off x="1377617" y="4451394"/>
             <a:ext cx="292608" cy="292608"/>
           </a:xfrm>
           <a:prstGeom prst="ellipse">
@@ -37317,7 +38263,7 @@
         </p:nvSpPr>
         <p:spPr>
           <a:xfrm>
-            <a:off x="1358407" y="4406494"/>
+            <a:off x="1377617" y="4451394"/>
             <a:ext cx="292608" cy="292608"/>
           </a:xfrm>
           <a:prstGeom prst="rect">
@@ -37356,12 +38302,12 @@
         </p:nvSpPr>
         <p:spPr>
           <a:xfrm>
-            <a:off x="1504711" y="5663140"/>
-            <a:ext cx="1654019" cy="241663"/>
+            <a:off x="1523921" y="5676877"/>
+            <a:ext cx="1615599" cy="237370"/>
           </a:xfrm>
           <a:prstGeom prst="roundRect">
             <a:avLst>
-              <a:gd name="adj" fmla="val 15135"/>
+              <a:gd name="adj" fmla="val 15409"/>
             </a:avLst>
           </a:prstGeom>
           <a:ln w="28575">
@@ -37380,7 +38326,7 @@
         </p:nvSpPr>
         <p:spPr>
           <a:xfrm>
-            <a:off x="1358407" y="5516836"/>
+            <a:off x="1377617" y="5530573"/>
             <a:ext cx="292608" cy="292608"/>
           </a:xfrm>
           <a:prstGeom prst="ellipse">
@@ -37405,7 +38351,7 @@
         </p:nvSpPr>
         <p:spPr>
           <a:xfrm>
-            <a:off x="1358407" y="5516836"/>
+            <a:off x="1377617" y="5530573"/>
             <a:ext cx="292608" cy="292608"/>
           </a:xfrm>
           <a:prstGeom prst="rect">
@@ -37536,7 +38482,7 @@
                 <a:ea typeface="Malgun Gothic" pitchFamily="34" charset="-122"/>
                 <a:cs typeface="Malgun Gothic" pitchFamily="34" charset="-120"/>
               </a:rPr>
-              <a:t>로그인 이름 · 이름 · 회사명 · 이메일</a:t>
+              <a:t>로그인 이름 · 이름 · 이메일</a:t>
             </a:r>
             <a:endParaRPr lang="en-US" sz="1500" dirty="0"/>
           </a:p>
@@ -37556,7 +38502,7 @@
                 <a:ea typeface="Malgun Gothic" pitchFamily="34" charset="-122"/>
                 <a:cs typeface="Malgun Gothic" pitchFamily="34" charset="-120"/>
               </a:rPr>
-              <a:t>모두 입력합니다. 로그인 이름은 영문으로 시작합니다(영문 · 숫자 · _ . -).</a:t>
+              <a:t>빨간 * 표시가 있는 칸은 꼭 적습니다. 회사명은 비워도 됩니다. 로그인 이름은 영문으로 시작합니다.</a:t>
             </a:r>
             <a:endParaRPr lang="en-US" sz="1500" dirty="0"/>
           </a:p>
@@ -38109,7 +39055,7 @@
                   <a:srgbClr val="0F1B2D"/>
                 </a:solidFill>
               </a:rPr>
-              <a:t>체험 계정으로 둘러보기</a:t>
+              <a:t>데모 계정으로 둘러보기</a:t>
             </a:r>
             <a:endParaRPr lang="en-US" sz="2600" dirty="0"/>
           </a:p>
@@ -38751,7 +39697,7 @@
                           <a:ea typeface="Malgun Gothic" pitchFamily="34" charset="-122"/>
                           <a:cs typeface="Malgun Gothic" pitchFamily="34" charset="-120"/>
                         </a:rPr>
-                        <a:t>체험 계정 (admin / 1234)</a:t>
+                        <a:t>데모 계정 (demo / 0629)</a:t>
                       </a:r>
                       <a:endParaRPr lang="en-US" sz="1200" dirty="0">
                         <a:latin typeface="Malgun Gothic" charset="0"/>
@@ -39507,7 +40453,7 @@
                           <a:ea typeface="Malgun Gothic" pitchFamily="34" charset="-122"/>
                           <a:cs typeface="Malgun Gothic" pitchFamily="34" charset="-120"/>
                         </a:rPr>
-                        <a:t>비밀번호 바꾸기 · 탈퇴</a:t>
+                        <a:t>내 계정 설정 · 탈퇴</a:t>
                       </a:r>
                       <a:endParaRPr lang="en-US" sz="1250" dirty="0">
                         <a:latin typeface="Malgun Gothic" charset="0"/>

--- a/VEXPLOR_AAS_Studio_user_manual.pptx
+++ b/VEXPLOR_AAS_Studio_user_manual.pptx
@@ -32520,7 +32520,7 @@
                 <a:ea typeface="Malgun Gothic" pitchFamily="34" charset="-122"/>
                 <a:cs typeface="Malgun Gothic" pitchFamily="34" charset="-120"/>
               </a:rPr>
-              <a:t>이 주소에는 아직 인증이 없습니다. 사내망에서만 사용하세요.</a:t>
+              <a:t>이 서버의 계정으로 로그인합니다. 첫 연결은 관리자가 승인합니다.</a:t>
             </a:r>
             <a:endParaRPr lang="en-US" sz="1250" dirty="0"/>
           </a:p>
